--- a/docs/pptx/auc3/ritu-auc3-linsubhr-egfrdisc-anyhosp.pptx
+++ b/docs/pptx/auc3/ritu-auc3-linsubhr-egfrdisc-anyhosp.pptx
@@ -2443,7 +2443,7 @@
           </p:nvSpPr>
           <p:spPr>
             <a:xfrm>
-              <a:off x="2040316" y="2073503"/>
+              <a:off x="2044638" y="2073503"/>
               <a:ext cx="0" cy="3649639"/>
             </a:xfrm>
             <a:custGeom>
@@ -2486,7 +2486,7 @@
           </p:nvSpPr>
           <p:spPr>
             <a:xfrm>
-              <a:off x="4520982" y="2073503"/>
+              <a:off x="4520586" y="2073503"/>
               <a:ext cx="0" cy="3649639"/>
             </a:xfrm>
             <a:custGeom>
@@ -2529,7 +2529,7 @@
           </p:nvSpPr>
           <p:spPr>
             <a:xfrm>
-              <a:off x="7001648" y="2073503"/>
+              <a:off x="6996534" y="2073503"/>
               <a:ext cx="0" cy="3649639"/>
             </a:xfrm>
             <a:custGeom>
@@ -2787,7 +2787,7 @@
           </p:nvSpPr>
           <p:spPr>
             <a:xfrm>
-              <a:off x="3280649" y="2073503"/>
+              <a:off x="3282612" y="2073503"/>
               <a:ext cx="0" cy="3649639"/>
             </a:xfrm>
             <a:custGeom>
@@ -2830,7 +2830,7 @@
           </p:nvSpPr>
           <p:spPr>
             <a:xfrm>
-              <a:off x="5761315" y="2073503"/>
+              <a:off x="5758560" y="2073503"/>
               <a:ext cx="0" cy="3649639"/>
             </a:xfrm>
             <a:custGeom>
@@ -2873,7 +2873,7 @@
           </p:nvSpPr>
           <p:spPr>
             <a:xfrm>
-              <a:off x="8241981" y="2073503"/>
+              <a:off x="8234508" y="2073503"/>
               <a:ext cx="0" cy="3649639"/>
             </a:xfrm>
             <a:custGeom>
@@ -2917,524 +2917,524 @@
           <p:spPr>
             <a:xfrm>
               <a:off x="1172049" y="2073503"/>
-              <a:ext cx="7090630" cy="3293802"/>
+              <a:ext cx="7090630" cy="3292862"/>
             </a:xfrm>
             <a:custGeom>
               <a:avLst/>
               <a:pathLst>
-                <a:path w="7090630" h="3293802">
+                <a:path w="7090630" h="3292862">
                   <a:moveTo>
-                    <a:pt x="2144496" y="0"/>
+                    <a:pt x="2141925" y="0"/>
                   </a:moveTo>
                   <a:lnTo>
-                    <a:pt x="2148675" y="8723"/>
-                  </a:lnTo>
-                  <a:lnTo>
-                    <a:pt x="2220298" y="152068"/>
-                  </a:lnTo>
-                  <a:lnTo>
-                    <a:pt x="2291920" y="289500"/>
-                  </a:lnTo>
-                  <a:lnTo>
-                    <a:pt x="2363543" y="421263"/>
-                  </a:lnTo>
-                  <a:lnTo>
-                    <a:pt x="2435165" y="547591"/>
-                  </a:lnTo>
-                  <a:lnTo>
-                    <a:pt x="2506788" y="668707"/>
-                  </a:lnTo>
-                  <a:lnTo>
-                    <a:pt x="2578410" y="784828"/>
-                  </a:lnTo>
-                  <a:lnTo>
-                    <a:pt x="2650033" y="896158"/>
-                  </a:lnTo>
-                  <a:lnTo>
-                    <a:pt x="2721655" y="1002896"/>
-                  </a:lnTo>
-                  <a:lnTo>
-                    <a:pt x="2793278" y="1105232"/>
-                  </a:lnTo>
-                  <a:lnTo>
-                    <a:pt x="2864901" y="1203345"/>
-                  </a:lnTo>
-                  <a:lnTo>
-                    <a:pt x="2936523" y="1297412"/>
-                  </a:lnTo>
-                  <a:lnTo>
-                    <a:pt x="3008146" y="1387598"/>
-                  </a:lnTo>
-                  <a:lnTo>
-                    <a:pt x="3079768" y="1474065"/>
-                  </a:lnTo>
-                  <a:lnTo>
-                    <a:pt x="3151391" y="1556964"/>
-                  </a:lnTo>
-                  <a:lnTo>
-                    <a:pt x="3223013" y="1636444"/>
-                  </a:lnTo>
-                  <a:lnTo>
-                    <a:pt x="3294636" y="1712645"/>
-                  </a:lnTo>
-                  <a:lnTo>
-                    <a:pt x="3366258" y="1785703"/>
-                  </a:lnTo>
-                  <a:lnTo>
-                    <a:pt x="3437881" y="1855748"/>
-                  </a:lnTo>
-                  <a:lnTo>
-                    <a:pt x="3509503" y="1922903"/>
-                  </a:lnTo>
-                  <a:lnTo>
-                    <a:pt x="3581126" y="1987288"/>
-                  </a:lnTo>
-                  <a:lnTo>
-                    <a:pt x="3652748" y="2049017"/>
-                  </a:lnTo>
-                  <a:lnTo>
-                    <a:pt x="3724371" y="2108199"/>
-                  </a:lnTo>
-                  <a:lnTo>
-                    <a:pt x="3795993" y="2164941"/>
-                  </a:lnTo>
-                  <a:lnTo>
-                    <a:pt x="3867616" y="2219341"/>
-                  </a:lnTo>
-                  <a:lnTo>
-                    <a:pt x="3939238" y="2271498"/>
-                  </a:lnTo>
-                  <a:lnTo>
-                    <a:pt x="4010861" y="2321503"/>
-                  </a:lnTo>
-                  <a:lnTo>
-                    <a:pt x="4082483" y="2369446"/>
-                  </a:lnTo>
-                  <a:lnTo>
-                    <a:pt x="4154106" y="2415411"/>
-                  </a:lnTo>
-                  <a:lnTo>
-                    <a:pt x="4225729" y="2459480"/>
-                  </a:lnTo>
-                  <a:lnTo>
-                    <a:pt x="4297351" y="2501731"/>
-                  </a:lnTo>
-                  <a:lnTo>
-                    <a:pt x="4368974" y="2542239"/>
-                  </a:lnTo>
-                  <a:lnTo>
-                    <a:pt x="4440596" y="2581076"/>
-                  </a:lnTo>
-                  <a:lnTo>
-                    <a:pt x="4512219" y="2618312"/>
-                  </a:lnTo>
-                  <a:lnTo>
-                    <a:pt x="4583841" y="2654011"/>
-                  </a:lnTo>
-                  <a:lnTo>
-                    <a:pt x="4655464" y="2648654"/>
-                  </a:lnTo>
-                  <a:lnTo>
-                    <a:pt x="4727086" y="2642942"/>
-                  </a:lnTo>
-                  <a:lnTo>
-                    <a:pt x="4798709" y="2637192"/>
-                  </a:lnTo>
-                  <a:lnTo>
-                    <a:pt x="4870331" y="2631401"/>
-                  </a:lnTo>
-                  <a:lnTo>
-                    <a:pt x="4941954" y="2625572"/>
-                  </a:lnTo>
-                  <a:lnTo>
-                    <a:pt x="5013576" y="2619702"/>
-                  </a:lnTo>
-                  <a:lnTo>
-                    <a:pt x="5085199" y="2613792"/>
-                  </a:lnTo>
-                  <a:lnTo>
-                    <a:pt x="5156821" y="2607842"/>
-                  </a:lnTo>
-                  <a:lnTo>
-                    <a:pt x="5228444" y="2601851"/>
-                  </a:lnTo>
-                  <a:lnTo>
-                    <a:pt x="5300066" y="2595820"/>
-                  </a:lnTo>
-                  <a:lnTo>
-                    <a:pt x="5371689" y="2589747"/>
-                  </a:lnTo>
-                  <a:lnTo>
-                    <a:pt x="5443311" y="2583632"/>
-                  </a:lnTo>
-                  <a:lnTo>
-                    <a:pt x="5514934" y="2577476"/>
-                  </a:lnTo>
-                  <a:lnTo>
-                    <a:pt x="5586557" y="2571277"/>
-                  </a:lnTo>
-                  <a:lnTo>
-                    <a:pt x="5658179" y="2565036"/>
-                  </a:lnTo>
-                  <a:lnTo>
-                    <a:pt x="5729802" y="2558752"/>
-                  </a:lnTo>
-                  <a:lnTo>
-                    <a:pt x="5801424" y="2552426"/>
-                  </a:lnTo>
-                  <a:lnTo>
-                    <a:pt x="5873047" y="2546056"/>
-                  </a:lnTo>
-                  <a:lnTo>
-                    <a:pt x="5944669" y="2539643"/>
-                  </a:lnTo>
-                  <a:lnTo>
-                    <a:pt x="6016292" y="2533185"/>
-                  </a:lnTo>
-                  <a:lnTo>
-                    <a:pt x="6087914" y="2526684"/>
-                  </a:lnTo>
-                  <a:lnTo>
-                    <a:pt x="6159537" y="2520138"/>
-                  </a:lnTo>
-                  <a:lnTo>
-                    <a:pt x="6231159" y="2513547"/>
-                  </a:lnTo>
-                  <a:lnTo>
-                    <a:pt x="6302782" y="2506911"/>
-                  </a:lnTo>
-                  <a:lnTo>
-                    <a:pt x="6374404" y="2500230"/>
-                  </a:lnTo>
-                  <a:lnTo>
-                    <a:pt x="6446027" y="2493503"/>
-                  </a:lnTo>
-                  <a:lnTo>
-                    <a:pt x="6517649" y="2486731"/>
-                  </a:lnTo>
-                  <a:lnTo>
-                    <a:pt x="6589272" y="2479911"/>
-                  </a:lnTo>
-                  <a:lnTo>
-                    <a:pt x="6660894" y="2473046"/>
-                  </a:lnTo>
-                  <a:lnTo>
-                    <a:pt x="6732517" y="2466133"/>
-                  </a:lnTo>
-                  <a:lnTo>
-                    <a:pt x="6804139" y="2459173"/>
-                  </a:lnTo>
-                  <a:lnTo>
-                    <a:pt x="6875762" y="2452165"/>
-                  </a:lnTo>
-                  <a:lnTo>
-                    <a:pt x="6947385" y="2445109"/>
-                  </a:lnTo>
-                  <a:lnTo>
-                    <a:pt x="7019007" y="2438006"/>
-                  </a:lnTo>
-                  <a:lnTo>
-                    <a:pt x="7090630" y="2430853"/>
-                  </a:lnTo>
-                  <a:lnTo>
-                    <a:pt x="7090630" y="3293802"/>
-                  </a:lnTo>
-                  <a:lnTo>
-                    <a:pt x="7019007" y="3285629"/>
-                  </a:lnTo>
-                  <a:lnTo>
-                    <a:pt x="6947385" y="3277105"/>
-                  </a:lnTo>
-                  <a:lnTo>
-                    <a:pt x="6875762" y="3268215"/>
-                  </a:lnTo>
-                  <a:lnTo>
-                    <a:pt x="6804139" y="3258942"/>
-                  </a:lnTo>
-                  <a:lnTo>
-                    <a:pt x="6732517" y="3249269"/>
-                  </a:lnTo>
-                  <a:lnTo>
-                    <a:pt x="6660894" y="3239181"/>
-                  </a:lnTo>
-                  <a:lnTo>
-                    <a:pt x="6589272" y="3228659"/>
-                  </a:lnTo>
-                  <a:lnTo>
-                    <a:pt x="6517649" y="3217684"/>
-                  </a:lnTo>
-                  <a:lnTo>
-                    <a:pt x="6446027" y="3206236"/>
-                  </a:lnTo>
-                  <a:lnTo>
-                    <a:pt x="6374404" y="3194296"/>
-                  </a:lnTo>
-                  <a:lnTo>
-                    <a:pt x="6302782" y="3181843"/>
-                  </a:lnTo>
-                  <a:lnTo>
-                    <a:pt x="6231159" y="3168853"/>
-                  </a:lnTo>
-                  <a:lnTo>
-                    <a:pt x="6159537" y="3155305"/>
-                  </a:lnTo>
-                  <a:lnTo>
-                    <a:pt x="6087914" y="3141174"/>
-                  </a:lnTo>
-                  <a:lnTo>
-                    <a:pt x="6016292" y="3126435"/>
-                  </a:lnTo>
-                  <a:lnTo>
-                    <a:pt x="5944669" y="3111062"/>
-                  </a:lnTo>
-                  <a:lnTo>
-                    <a:pt x="5873047" y="3095027"/>
-                  </a:lnTo>
-                  <a:lnTo>
-                    <a:pt x="5801424" y="3078303"/>
-                  </a:lnTo>
-                  <a:lnTo>
-                    <a:pt x="5729802" y="3060858"/>
-                  </a:lnTo>
-                  <a:lnTo>
-                    <a:pt x="5658179" y="3042664"/>
-                  </a:lnTo>
-                  <a:lnTo>
-                    <a:pt x="5586557" y="3023686"/>
-                  </a:lnTo>
-                  <a:lnTo>
-                    <a:pt x="5514934" y="3003892"/>
-                  </a:lnTo>
-                  <a:lnTo>
-                    <a:pt x="5443311" y="2983247"/>
-                  </a:lnTo>
-                  <a:lnTo>
-                    <a:pt x="5371689" y="2961713"/>
-                  </a:lnTo>
-                  <a:lnTo>
-                    <a:pt x="5300066" y="2939252"/>
-                  </a:lnTo>
-                  <a:lnTo>
-                    <a:pt x="5228444" y="2915825"/>
-                  </a:lnTo>
-                  <a:lnTo>
-                    <a:pt x="5156821" y="2891391"/>
-                  </a:lnTo>
-                  <a:lnTo>
-                    <a:pt x="5085199" y="2865905"/>
-                  </a:lnTo>
-                  <a:lnTo>
-                    <a:pt x="5013576" y="2839322"/>
-                  </a:lnTo>
-                  <a:lnTo>
-                    <a:pt x="4941954" y="2811596"/>
-                  </a:lnTo>
-                  <a:lnTo>
-                    <a:pt x="4870331" y="2782677"/>
-                  </a:lnTo>
-                  <a:lnTo>
-                    <a:pt x="4798709" y="2752513"/>
-                  </a:lnTo>
-                  <a:lnTo>
-                    <a:pt x="4727086" y="2721052"/>
-                  </a:lnTo>
-                  <a:lnTo>
-                    <a:pt x="4655464" y="2688237"/>
-                  </a:lnTo>
-                  <a:lnTo>
-                    <a:pt x="4583841" y="2654327"/>
-                  </a:lnTo>
-                  <a:lnTo>
-                    <a:pt x="4512219" y="2659961"/>
-                  </a:lnTo>
-                  <a:lnTo>
-                    <a:pt x="4440596" y="2665557"/>
-                  </a:lnTo>
-                  <a:lnTo>
-                    <a:pt x="4368974" y="2671115"/>
-                  </a:lnTo>
-                  <a:lnTo>
-                    <a:pt x="4297351" y="2676636"/>
-                  </a:lnTo>
-                  <a:lnTo>
-                    <a:pt x="4225729" y="2682119"/>
-                  </a:lnTo>
-                  <a:lnTo>
-                    <a:pt x="4154106" y="2687564"/>
-                  </a:lnTo>
-                  <a:lnTo>
-                    <a:pt x="4082483" y="2692973"/>
-                  </a:lnTo>
-                  <a:lnTo>
-                    <a:pt x="4010861" y="2698345"/>
-                  </a:lnTo>
-                  <a:lnTo>
-                    <a:pt x="3939238" y="2703680"/>
-                  </a:lnTo>
-                  <a:lnTo>
-                    <a:pt x="3867616" y="2708979"/>
-                  </a:lnTo>
-                  <a:lnTo>
-                    <a:pt x="3795993" y="2714242"/>
-                  </a:lnTo>
-                  <a:lnTo>
-                    <a:pt x="3724371" y="2719469"/>
-                  </a:lnTo>
-                  <a:lnTo>
-                    <a:pt x="3652748" y="2724661"/>
-                  </a:lnTo>
-                  <a:lnTo>
-                    <a:pt x="3581126" y="2729818"/>
-                  </a:lnTo>
-                  <a:lnTo>
-                    <a:pt x="3509503" y="2734939"/>
-                  </a:lnTo>
-                  <a:lnTo>
-                    <a:pt x="3437881" y="2740026"/>
-                  </a:lnTo>
-                  <a:lnTo>
-                    <a:pt x="3366258" y="2745078"/>
-                  </a:lnTo>
-                  <a:lnTo>
-                    <a:pt x="3294636" y="2750096"/>
-                  </a:lnTo>
-                  <a:lnTo>
-                    <a:pt x="3223013" y="2755080"/>
-                  </a:lnTo>
-                  <a:lnTo>
-                    <a:pt x="3151391" y="2760030"/>
-                  </a:lnTo>
-                  <a:lnTo>
-                    <a:pt x="3079768" y="2764946"/>
-                  </a:lnTo>
-                  <a:lnTo>
-                    <a:pt x="3008146" y="2769829"/>
-                  </a:lnTo>
-                  <a:lnTo>
-                    <a:pt x="2936523" y="2774679"/>
-                  </a:lnTo>
-                  <a:lnTo>
-                    <a:pt x="2864901" y="2779496"/>
-                  </a:lnTo>
-                  <a:lnTo>
-                    <a:pt x="2793278" y="2784280"/>
-                  </a:lnTo>
-                  <a:lnTo>
-                    <a:pt x="2721655" y="2789031"/>
-                  </a:lnTo>
-                  <a:lnTo>
-                    <a:pt x="2650033" y="2793751"/>
-                  </a:lnTo>
-                  <a:lnTo>
-                    <a:pt x="2578410" y="2798438"/>
-                  </a:lnTo>
-                  <a:lnTo>
-                    <a:pt x="2506788" y="2803093"/>
-                  </a:lnTo>
-                  <a:lnTo>
-                    <a:pt x="2435165" y="2807717"/>
-                  </a:lnTo>
-                  <a:lnTo>
-                    <a:pt x="2363543" y="2812309"/>
-                  </a:lnTo>
-                  <a:lnTo>
-                    <a:pt x="2291920" y="2816871"/>
-                  </a:lnTo>
-                  <a:lnTo>
-                    <a:pt x="2220298" y="2821401"/>
-                  </a:lnTo>
-                  <a:lnTo>
-                    <a:pt x="2148675" y="2825900"/>
-                  </a:lnTo>
-                  <a:lnTo>
-                    <a:pt x="2077053" y="2830369"/>
-                  </a:lnTo>
-                  <a:lnTo>
-                    <a:pt x="2005430" y="2834807"/>
-                  </a:lnTo>
-                  <a:lnTo>
-                    <a:pt x="1933808" y="2839216"/>
-                  </a:lnTo>
-                  <a:lnTo>
-                    <a:pt x="1862185" y="2843594"/>
-                  </a:lnTo>
-                  <a:lnTo>
-                    <a:pt x="1790563" y="2847943"/>
-                  </a:lnTo>
-                  <a:lnTo>
-                    <a:pt x="1718940" y="2852262"/>
-                  </a:lnTo>
-                  <a:lnTo>
-                    <a:pt x="1647318" y="2856552"/>
-                  </a:lnTo>
-                  <a:lnTo>
-                    <a:pt x="1575695" y="2860812"/>
-                  </a:lnTo>
-                  <a:lnTo>
-                    <a:pt x="1504073" y="2865044"/>
-                  </a:lnTo>
-                  <a:lnTo>
-                    <a:pt x="1432450" y="2869247"/>
-                  </a:lnTo>
-                  <a:lnTo>
-                    <a:pt x="1360827" y="2873421"/>
-                  </a:lnTo>
-                  <a:lnTo>
-                    <a:pt x="1289205" y="2877567"/>
-                  </a:lnTo>
-                  <a:lnTo>
-                    <a:pt x="1217582" y="2881685"/>
-                  </a:lnTo>
-                  <a:lnTo>
-                    <a:pt x="1145960" y="2885775"/>
-                  </a:lnTo>
-                  <a:lnTo>
-                    <a:pt x="1074337" y="2889837"/>
-                  </a:lnTo>
-                  <a:lnTo>
-                    <a:pt x="1002715" y="2893872"/>
-                  </a:lnTo>
-                  <a:lnTo>
-                    <a:pt x="931092" y="2897879"/>
-                  </a:lnTo>
-                  <a:lnTo>
-                    <a:pt x="859470" y="2901859"/>
-                  </a:lnTo>
-                  <a:lnTo>
-                    <a:pt x="787847" y="2905812"/>
-                  </a:lnTo>
-                  <a:lnTo>
-                    <a:pt x="716225" y="2909737"/>
-                  </a:lnTo>
-                  <a:lnTo>
-                    <a:pt x="644602" y="2913637"/>
-                  </a:lnTo>
-                  <a:lnTo>
-                    <a:pt x="572980" y="2917510"/>
-                  </a:lnTo>
-                  <a:lnTo>
-                    <a:pt x="501357" y="2921356"/>
-                  </a:lnTo>
-                  <a:lnTo>
-                    <a:pt x="429735" y="2925177"/>
-                  </a:lnTo>
-                  <a:lnTo>
-                    <a:pt x="358112" y="2928971"/>
-                  </a:lnTo>
-                  <a:lnTo>
-                    <a:pt x="286490" y="2932740"/>
-                  </a:lnTo>
-                  <a:lnTo>
-                    <a:pt x="214867" y="2936483"/>
-                  </a:lnTo>
-                  <a:lnTo>
-                    <a:pt x="143245" y="2940200"/>
-                  </a:lnTo>
-                  <a:lnTo>
-                    <a:pt x="71622" y="2943893"/>
-                  </a:lnTo>
-                  <a:lnTo>
-                    <a:pt x="0" y="2947560"/>
+                    <a:pt x="2148675" y="14037"/>
+                  </a:lnTo>
+                  <a:lnTo>
+                    <a:pt x="2220298" y="156851"/>
+                  </a:lnTo>
+                  <a:lnTo>
+                    <a:pt x="2291920" y="293787"/>
+                  </a:lnTo>
+                  <a:lnTo>
+                    <a:pt x="2363543" y="425086"/>
+                  </a:lnTo>
+                  <a:lnTo>
+                    <a:pt x="2435165" y="550981"/>
+                  </a:lnTo>
+                  <a:lnTo>
+                    <a:pt x="2506788" y="671694"/>
+                  </a:lnTo>
+                  <a:lnTo>
+                    <a:pt x="2578410" y="787439"/>
+                  </a:lnTo>
+                  <a:lnTo>
+                    <a:pt x="2650033" y="898420"/>
+                  </a:lnTo>
+                  <a:lnTo>
+                    <a:pt x="2721655" y="1004832"/>
+                  </a:lnTo>
+                  <a:lnTo>
+                    <a:pt x="2793278" y="1106865"/>
+                  </a:lnTo>
+                  <a:lnTo>
+                    <a:pt x="2864901" y="1204698"/>
+                  </a:lnTo>
+                  <a:lnTo>
+                    <a:pt x="2936523" y="1298504"/>
+                  </a:lnTo>
+                  <a:lnTo>
+                    <a:pt x="3008146" y="1388449"/>
+                  </a:lnTo>
+                  <a:lnTo>
+                    <a:pt x="3079768" y="1474692"/>
+                  </a:lnTo>
+                  <a:lnTo>
+                    <a:pt x="3151391" y="1557385"/>
+                  </a:lnTo>
+                  <a:lnTo>
+                    <a:pt x="3223013" y="1636674"/>
+                  </a:lnTo>
+                  <a:lnTo>
+                    <a:pt x="3294636" y="1712700"/>
+                  </a:lnTo>
+                  <a:lnTo>
+                    <a:pt x="3366258" y="1785597"/>
+                  </a:lnTo>
+                  <a:lnTo>
+                    <a:pt x="3437881" y="1855493"/>
+                  </a:lnTo>
+                  <a:lnTo>
+                    <a:pt x="3509503" y="1922512"/>
+                  </a:lnTo>
+                  <a:lnTo>
+                    <a:pt x="3581126" y="1986773"/>
+                  </a:lnTo>
+                  <a:lnTo>
+                    <a:pt x="3652748" y="2048389"/>
+                  </a:lnTo>
+                  <a:lnTo>
+                    <a:pt x="3724371" y="2107468"/>
+                  </a:lnTo>
+                  <a:lnTo>
+                    <a:pt x="3795993" y="2164116"/>
+                  </a:lnTo>
+                  <a:lnTo>
+                    <a:pt x="3867616" y="2218432"/>
+                  </a:lnTo>
+                  <a:lnTo>
+                    <a:pt x="3939238" y="2270513"/>
+                  </a:lnTo>
+                  <a:lnTo>
+                    <a:pt x="4010861" y="2320450"/>
+                  </a:lnTo>
+                  <a:lnTo>
+                    <a:pt x="4082483" y="2368332"/>
+                  </a:lnTo>
+                  <a:lnTo>
+                    <a:pt x="4154106" y="2414242"/>
+                  </a:lnTo>
+                  <a:lnTo>
+                    <a:pt x="4225729" y="2458263"/>
+                  </a:lnTo>
+                  <a:lnTo>
+                    <a:pt x="4297351" y="2500472"/>
+                  </a:lnTo>
+                  <a:lnTo>
+                    <a:pt x="4368974" y="2540944"/>
+                  </a:lnTo>
+                  <a:lnTo>
+                    <a:pt x="4440596" y="2579750"/>
+                  </a:lnTo>
+                  <a:lnTo>
+                    <a:pt x="4512219" y="2616959"/>
+                  </a:lnTo>
+                  <a:lnTo>
+                    <a:pt x="4583841" y="2652636"/>
+                  </a:lnTo>
+                  <a:lnTo>
+                    <a:pt x="4655464" y="2648181"/>
+                  </a:lnTo>
+                  <a:lnTo>
+                    <a:pt x="4727086" y="2641728"/>
+                  </a:lnTo>
+                  <a:lnTo>
+                    <a:pt x="4798709" y="2635226"/>
+                  </a:lnTo>
+                  <a:lnTo>
+                    <a:pt x="4870331" y="2628673"/>
+                  </a:lnTo>
+                  <a:lnTo>
+                    <a:pt x="4941954" y="2622070"/>
+                  </a:lnTo>
+                  <a:lnTo>
+                    <a:pt x="5013576" y="2615415"/>
+                  </a:lnTo>
+                  <a:lnTo>
+                    <a:pt x="5085199" y="2608710"/>
+                  </a:lnTo>
+                  <a:lnTo>
+                    <a:pt x="5156821" y="2601952"/>
+                  </a:lnTo>
+                  <a:lnTo>
+                    <a:pt x="5228444" y="2595143"/>
+                  </a:lnTo>
+                  <a:lnTo>
+                    <a:pt x="5300066" y="2588280"/>
+                  </a:lnTo>
+                  <a:lnTo>
+                    <a:pt x="5371689" y="2581365"/>
+                  </a:lnTo>
+                  <a:lnTo>
+                    <a:pt x="5443311" y="2574397"/>
+                  </a:lnTo>
+                  <a:lnTo>
+                    <a:pt x="5514934" y="2567374"/>
+                  </a:lnTo>
+                  <a:lnTo>
+                    <a:pt x="5586557" y="2560297"/>
+                  </a:lnTo>
+                  <a:lnTo>
+                    <a:pt x="5658179" y="2553166"/>
+                  </a:lnTo>
+                  <a:lnTo>
+                    <a:pt x="5729802" y="2545980"/>
+                  </a:lnTo>
+                  <a:lnTo>
+                    <a:pt x="5801424" y="2538738"/>
+                  </a:lnTo>
+                  <a:lnTo>
+                    <a:pt x="5873047" y="2531440"/>
+                  </a:lnTo>
+                  <a:lnTo>
+                    <a:pt x="5944669" y="2524086"/>
+                  </a:lnTo>
+                  <a:lnTo>
+                    <a:pt x="6016292" y="2516675"/>
+                  </a:lnTo>
+                  <a:lnTo>
+                    <a:pt x="6087914" y="2509207"/>
+                  </a:lnTo>
+                  <a:lnTo>
+                    <a:pt x="6159537" y="2501681"/>
+                  </a:lnTo>
+                  <a:lnTo>
+                    <a:pt x="6231159" y="2494097"/>
+                  </a:lnTo>
+                  <a:lnTo>
+                    <a:pt x="6302782" y="2486454"/>
+                  </a:lnTo>
+                  <a:lnTo>
+                    <a:pt x="6374404" y="2478753"/>
+                  </a:lnTo>
+                  <a:lnTo>
+                    <a:pt x="6446027" y="2470992"/>
+                  </a:lnTo>
+                  <a:lnTo>
+                    <a:pt x="6517649" y="2463171"/>
+                  </a:lnTo>
+                  <a:lnTo>
+                    <a:pt x="6589272" y="2455289"/>
+                  </a:lnTo>
+                  <a:lnTo>
+                    <a:pt x="6660894" y="2447347"/>
+                  </a:lnTo>
+                  <a:lnTo>
+                    <a:pt x="6732517" y="2439344"/>
+                  </a:lnTo>
+                  <a:lnTo>
+                    <a:pt x="6804139" y="2431278"/>
+                  </a:lnTo>
+                  <a:lnTo>
+                    <a:pt x="6875762" y="2423151"/>
+                  </a:lnTo>
+                  <a:lnTo>
+                    <a:pt x="6947385" y="2414960"/>
+                  </a:lnTo>
+                  <a:lnTo>
+                    <a:pt x="7019007" y="2406706"/>
+                  </a:lnTo>
+                  <a:lnTo>
+                    <a:pt x="7090630" y="2398389"/>
+                  </a:lnTo>
+                  <a:lnTo>
+                    <a:pt x="7090630" y="3292862"/>
+                  </a:lnTo>
+                  <a:lnTo>
+                    <a:pt x="7019007" y="3284668"/>
+                  </a:lnTo>
+                  <a:lnTo>
+                    <a:pt x="6947385" y="3276122"/>
+                  </a:lnTo>
+                  <a:lnTo>
+                    <a:pt x="6875762" y="3267209"/>
+                  </a:lnTo>
+                  <a:lnTo>
+                    <a:pt x="6804139" y="3257914"/>
+                  </a:lnTo>
+                  <a:lnTo>
+                    <a:pt x="6732517" y="3248220"/>
+                  </a:lnTo>
+                  <a:lnTo>
+                    <a:pt x="6660894" y="3238109"/>
+                  </a:lnTo>
+                  <a:lnTo>
+                    <a:pt x="6589272" y="3227565"/>
+                  </a:lnTo>
+                  <a:lnTo>
+                    <a:pt x="6517649" y="3216568"/>
+                  </a:lnTo>
+                  <a:lnTo>
+                    <a:pt x="6446027" y="3205098"/>
+                  </a:lnTo>
+                  <a:lnTo>
+                    <a:pt x="6374404" y="3193137"/>
+                  </a:lnTo>
+                  <a:lnTo>
+                    <a:pt x="6302782" y="3180662"/>
+                  </a:lnTo>
+                  <a:lnTo>
+                    <a:pt x="6231159" y="3167651"/>
+                  </a:lnTo>
+                  <a:lnTo>
+                    <a:pt x="6159537" y="3154082"/>
+                  </a:lnTo>
+                  <a:lnTo>
+                    <a:pt x="6087914" y="3139931"/>
+                  </a:lnTo>
+                  <a:lnTo>
+                    <a:pt x="6016292" y="3125172"/>
+                  </a:lnTo>
+                  <a:lnTo>
+                    <a:pt x="5944669" y="3109779"/>
+                  </a:lnTo>
+                  <a:lnTo>
+                    <a:pt x="5873047" y="3093726"/>
+                  </a:lnTo>
+                  <a:lnTo>
+                    <a:pt x="5801424" y="3076983"/>
+                  </a:lnTo>
+                  <a:lnTo>
+                    <a:pt x="5729802" y="3059522"/>
+                  </a:lnTo>
+                  <a:lnTo>
+                    <a:pt x="5658179" y="3041311"/>
+                  </a:lnTo>
+                  <a:lnTo>
+                    <a:pt x="5586557" y="3022319"/>
+                  </a:lnTo>
+                  <a:lnTo>
+                    <a:pt x="5514934" y="3002511"/>
+                  </a:lnTo>
+                  <a:lnTo>
+                    <a:pt x="5443311" y="2981853"/>
+                  </a:lnTo>
+                  <a:lnTo>
+                    <a:pt x="5371689" y="2960308"/>
+                  </a:lnTo>
+                  <a:lnTo>
+                    <a:pt x="5300066" y="2937839"/>
+                  </a:lnTo>
+                  <a:lnTo>
+                    <a:pt x="5228444" y="2914404"/>
+                  </a:lnTo>
+                  <a:lnTo>
+                    <a:pt x="5156821" y="2889964"/>
+                  </a:lnTo>
+                  <a:lnTo>
+                    <a:pt x="5085199" y="2864475"/>
+                  </a:lnTo>
+                  <a:lnTo>
+                    <a:pt x="5013576" y="2837891"/>
+                  </a:lnTo>
+                  <a:lnTo>
+                    <a:pt x="4941954" y="2810167"/>
+                  </a:lnTo>
+                  <a:lnTo>
+                    <a:pt x="4870331" y="2781252"/>
+                  </a:lnTo>
+                  <a:lnTo>
+                    <a:pt x="4798709" y="2751096"/>
+                  </a:lnTo>
+                  <a:lnTo>
+                    <a:pt x="4727086" y="2719645"/>
+                  </a:lnTo>
+                  <a:lnTo>
+                    <a:pt x="4655464" y="2686845"/>
+                  </a:lnTo>
+                  <a:lnTo>
+                    <a:pt x="4583841" y="2654584"/>
+                  </a:lnTo>
+                  <a:lnTo>
+                    <a:pt x="4512219" y="2660938"/>
+                  </a:lnTo>
+                  <a:lnTo>
+                    <a:pt x="4440596" y="2667243"/>
+                  </a:lnTo>
+                  <a:lnTo>
+                    <a:pt x="4368974" y="2673501"/>
+                  </a:lnTo>
+                  <a:lnTo>
+                    <a:pt x="4297351" y="2679710"/>
+                  </a:lnTo>
+                  <a:lnTo>
+                    <a:pt x="4225729" y="2685871"/>
+                  </a:lnTo>
+                  <a:lnTo>
+                    <a:pt x="4154106" y="2691986"/>
+                  </a:lnTo>
+                  <a:lnTo>
+                    <a:pt x="4082483" y="2698053"/>
+                  </a:lnTo>
+                  <a:lnTo>
+                    <a:pt x="4010861" y="2704074"/>
+                  </a:lnTo>
+                  <a:lnTo>
+                    <a:pt x="3939238" y="2710049"/>
+                  </a:lnTo>
+                  <a:lnTo>
+                    <a:pt x="3867616" y="2715978"/>
+                  </a:lnTo>
+                  <a:lnTo>
+                    <a:pt x="3795993" y="2721862"/>
+                  </a:lnTo>
+                  <a:lnTo>
+                    <a:pt x="3724371" y="2727700"/>
+                  </a:lnTo>
+                  <a:lnTo>
+                    <a:pt x="3652748" y="2733494"/>
+                  </a:lnTo>
+                  <a:lnTo>
+                    <a:pt x="3581126" y="2739244"/>
+                  </a:lnTo>
+                  <a:lnTo>
+                    <a:pt x="3509503" y="2744949"/>
+                  </a:lnTo>
+                  <a:lnTo>
+                    <a:pt x="3437881" y="2750611"/>
+                  </a:lnTo>
+                  <a:lnTo>
+                    <a:pt x="3366258" y="2756229"/>
+                  </a:lnTo>
+                  <a:lnTo>
+                    <a:pt x="3294636" y="2761804"/>
+                  </a:lnTo>
+                  <a:lnTo>
+                    <a:pt x="3223013" y="2767336"/>
+                  </a:lnTo>
+                  <a:lnTo>
+                    <a:pt x="3151391" y="2772826"/>
+                  </a:lnTo>
+                  <a:lnTo>
+                    <a:pt x="3079768" y="2778274"/>
+                  </a:lnTo>
+                  <a:lnTo>
+                    <a:pt x="3008146" y="2783681"/>
+                  </a:lnTo>
+                  <a:lnTo>
+                    <a:pt x="2936523" y="2789046"/>
+                  </a:lnTo>
+                  <a:lnTo>
+                    <a:pt x="2864901" y="2794369"/>
+                  </a:lnTo>
+                  <a:lnTo>
+                    <a:pt x="2793278" y="2799652"/>
+                  </a:lnTo>
+                  <a:lnTo>
+                    <a:pt x="2721655" y="2804895"/>
+                  </a:lnTo>
+                  <a:lnTo>
+                    <a:pt x="2650033" y="2810097"/>
+                  </a:lnTo>
+                  <a:lnTo>
+                    <a:pt x="2578410" y="2815259"/>
+                  </a:lnTo>
+                  <a:lnTo>
+                    <a:pt x="2506788" y="2820382"/>
+                  </a:lnTo>
+                  <a:lnTo>
+                    <a:pt x="2435165" y="2825466"/>
+                  </a:lnTo>
+                  <a:lnTo>
+                    <a:pt x="2363543" y="2830510"/>
+                  </a:lnTo>
+                  <a:lnTo>
+                    <a:pt x="2291920" y="2835516"/>
+                  </a:lnTo>
+                  <a:lnTo>
+                    <a:pt x="2220298" y="2840484"/>
+                  </a:lnTo>
+                  <a:lnTo>
+                    <a:pt x="2148675" y="2845413"/>
+                  </a:lnTo>
+                  <a:lnTo>
+                    <a:pt x="2077053" y="2850305"/>
+                  </a:lnTo>
+                  <a:lnTo>
+                    <a:pt x="2005430" y="2855159"/>
+                  </a:lnTo>
+                  <a:lnTo>
+                    <a:pt x="1933808" y="2859976"/>
+                  </a:lnTo>
+                  <a:lnTo>
+                    <a:pt x="1862185" y="2864756"/>
+                  </a:lnTo>
+                  <a:lnTo>
+                    <a:pt x="1790563" y="2869500"/>
+                  </a:lnTo>
+                  <a:lnTo>
+                    <a:pt x="1718940" y="2874207"/>
+                  </a:lnTo>
+                  <a:lnTo>
+                    <a:pt x="1647318" y="2878878"/>
+                  </a:lnTo>
+                  <a:lnTo>
+                    <a:pt x="1575695" y="2883513"/>
+                  </a:lnTo>
+                  <a:lnTo>
+                    <a:pt x="1504073" y="2888113"/>
+                  </a:lnTo>
+                  <a:lnTo>
+                    <a:pt x="1432450" y="2892678"/>
+                  </a:lnTo>
+                  <a:lnTo>
+                    <a:pt x="1360827" y="2897207"/>
+                  </a:lnTo>
+                  <a:lnTo>
+                    <a:pt x="1289205" y="2901702"/>
+                  </a:lnTo>
+                  <a:lnTo>
+                    <a:pt x="1217582" y="2906162"/>
+                  </a:lnTo>
+                  <a:lnTo>
+                    <a:pt x="1145960" y="2910589"/>
+                  </a:lnTo>
+                  <a:lnTo>
+                    <a:pt x="1074337" y="2914981"/>
+                  </a:lnTo>
+                  <a:lnTo>
+                    <a:pt x="1002715" y="2919340"/>
+                  </a:lnTo>
+                  <a:lnTo>
+                    <a:pt x="931092" y="2923665"/>
+                  </a:lnTo>
+                  <a:lnTo>
+                    <a:pt x="859470" y="2927957"/>
+                  </a:lnTo>
+                  <a:lnTo>
+                    <a:pt x="787847" y="2932216"/>
+                  </a:lnTo>
+                  <a:lnTo>
+                    <a:pt x="716225" y="2936443"/>
+                  </a:lnTo>
+                  <a:lnTo>
+                    <a:pt x="644602" y="2940637"/>
+                  </a:lnTo>
+                  <a:lnTo>
+                    <a:pt x="572980" y="2944799"/>
+                  </a:lnTo>
+                  <a:lnTo>
+                    <a:pt x="501357" y="2948929"/>
+                  </a:lnTo>
+                  <a:lnTo>
+                    <a:pt x="429735" y="2953027"/>
+                  </a:lnTo>
+                  <a:lnTo>
+                    <a:pt x="358112" y="2957094"/>
+                  </a:lnTo>
+                  <a:lnTo>
+                    <a:pt x="286490" y="2961130"/>
+                  </a:lnTo>
+                  <a:lnTo>
+                    <a:pt x="214867" y="2965135"/>
+                  </a:lnTo>
+                  <a:lnTo>
+                    <a:pt x="143245" y="2969109"/>
+                  </a:lnTo>
+                  <a:lnTo>
+                    <a:pt x="71622" y="2973053"/>
+                  </a:lnTo>
+                  <a:lnTo>
+                    <a:pt x="0" y="2976967"/>
                   </a:lnTo>
                   <a:close/>
                 </a:path>
@@ -3460,225 +3460,225 @@
           </p:nvSpPr>
           <p:spPr>
             <a:xfrm>
-              <a:off x="3316546" y="2073503"/>
-              <a:ext cx="4946133" cy="2654011"/>
+              <a:off x="3313974" y="2073503"/>
+              <a:ext cx="4948704" cy="2652636"/>
             </a:xfrm>
             <a:custGeom>
               <a:avLst/>
               <a:pathLst>
-                <a:path w="4946133" h="2654011">
+                <a:path w="4948704" h="2652636">
                   <a:moveTo>
                     <a:pt x="0" y="0"/>
                   </a:moveTo>
                   <a:lnTo>
-                    <a:pt x="4179" y="8723"/>
-                  </a:lnTo>
-                  <a:lnTo>
-                    <a:pt x="75801" y="152068"/>
-                  </a:lnTo>
-                  <a:lnTo>
-                    <a:pt x="147424" y="289500"/>
-                  </a:lnTo>
-                  <a:lnTo>
-                    <a:pt x="219046" y="421263"/>
-                  </a:lnTo>
-                  <a:lnTo>
-                    <a:pt x="290669" y="547591"/>
-                  </a:lnTo>
-                  <a:lnTo>
-                    <a:pt x="362291" y="668707"/>
-                  </a:lnTo>
-                  <a:lnTo>
-                    <a:pt x="433914" y="784828"/>
-                  </a:lnTo>
-                  <a:lnTo>
-                    <a:pt x="505536" y="896158"/>
-                  </a:lnTo>
-                  <a:lnTo>
-                    <a:pt x="577159" y="1002896"/>
-                  </a:lnTo>
-                  <a:lnTo>
-                    <a:pt x="648781" y="1105232"/>
-                  </a:lnTo>
-                  <a:lnTo>
-                    <a:pt x="720404" y="1203345"/>
-                  </a:lnTo>
-                  <a:lnTo>
-                    <a:pt x="792026" y="1297412"/>
-                  </a:lnTo>
-                  <a:lnTo>
-                    <a:pt x="863649" y="1387598"/>
-                  </a:lnTo>
-                  <a:lnTo>
-                    <a:pt x="935271" y="1474065"/>
-                  </a:lnTo>
-                  <a:lnTo>
-                    <a:pt x="1006894" y="1556964"/>
-                  </a:lnTo>
-                  <a:lnTo>
-                    <a:pt x="1078517" y="1636444"/>
-                  </a:lnTo>
-                  <a:lnTo>
-                    <a:pt x="1150139" y="1712645"/>
-                  </a:lnTo>
-                  <a:lnTo>
-                    <a:pt x="1221762" y="1785703"/>
-                  </a:lnTo>
-                  <a:lnTo>
-                    <a:pt x="1293384" y="1855748"/>
-                  </a:lnTo>
-                  <a:lnTo>
-                    <a:pt x="1365007" y="1922903"/>
-                  </a:lnTo>
-                  <a:lnTo>
-                    <a:pt x="1436629" y="1987288"/>
-                  </a:lnTo>
-                  <a:lnTo>
-                    <a:pt x="1508252" y="2049017"/>
-                  </a:lnTo>
-                  <a:lnTo>
-                    <a:pt x="1579874" y="2108199"/>
-                  </a:lnTo>
-                  <a:lnTo>
-                    <a:pt x="1651497" y="2164941"/>
-                  </a:lnTo>
-                  <a:lnTo>
-                    <a:pt x="1723119" y="2219341"/>
-                  </a:lnTo>
-                  <a:lnTo>
-                    <a:pt x="1794742" y="2271498"/>
-                  </a:lnTo>
-                  <a:lnTo>
-                    <a:pt x="1866364" y="2321503"/>
-                  </a:lnTo>
-                  <a:lnTo>
-                    <a:pt x="1937987" y="2369446"/>
-                  </a:lnTo>
-                  <a:lnTo>
-                    <a:pt x="2009609" y="2415411"/>
-                  </a:lnTo>
-                  <a:lnTo>
-                    <a:pt x="2081232" y="2459480"/>
-                  </a:lnTo>
-                  <a:lnTo>
-                    <a:pt x="2152854" y="2501731"/>
-                  </a:lnTo>
-                  <a:lnTo>
-                    <a:pt x="2224477" y="2542239"/>
-                  </a:lnTo>
-                  <a:lnTo>
-                    <a:pt x="2296099" y="2581076"/>
-                  </a:lnTo>
-                  <a:lnTo>
-                    <a:pt x="2367722" y="2618312"/>
-                  </a:lnTo>
-                  <a:lnTo>
-                    <a:pt x="2439345" y="2654011"/>
-                  </a:lnTo>
-                  <a:lnTo>
-                    <a:pt x="2510967" y="2648654"/>
-                  </a:lnTo>
-                  <a:lnTo>
-                    <a:pt x="2582590" y="2642942"/>
-                  </a:lnTo>
-                  <a:lnTo>
-                    <a:pt x="2654212" y="2637192"/>
-                  </a:lnTo>
-                  <a:lnTo>
-                    <a:pt x="2725835" y="2631401"/>
-                  </a:lnTo>
-                  <a:lnTo>
-                    <a:pt x="2797457" y="2625572"/>
-                  </a:lnTo>
-                  <a:lnTo>
-                    <a:pt x="2869080" y="2619702"/>
-                  </a:lnTo>
-                  <a:lnTo>
-                    <a:pt x="2940702" y="2613792"/>
-                  </a:lnTo>
-                  <a:lnTo>
-                    <a:pt x="3012325" y="2607842"/>
-                  </a:lnTo>
-                  <a:lnTo>
-                    <a:pt x="3083947" y="2601851"/>
-                  </a:lnTo>
-                  <a:lnTo>
-                    <a:pt x="3155570" y="2595820"/>
-                  </a:lnTo>
-                  <a:lnTo>
-                    <a:pt x="3227192" y="2589747"/>
-                  </a:lnTo>
-                  <a:lnTo>
-                    <a:pt x="3298815" y="2583632"/>
-                  </a:lnTo>
-                  <a:lnTo>
-                    <a:pt x="3370437" y="2577476"/>
-                  </a:lnTo>
-                  <a:lnTo>
-                    <a:pt x="3442060" y="2571277"/>
-                  </a:lnTo>
-                  <a:lnTo>
-                    <a:pt x="3513682" y="2565036"/>
-                  </a:lnTo>
-                  <a:lnTo>
-                    <a:pt x="3585305" y="2558752"/>
-                  </a:lnTo>
-                  <a:lnTo>
-                    <a:pt x="3656927" y="2552426"/>
-                  </a:lnTo>
-                  <a:lnTo>
-                    <a:pt x="3728550" y="2546056"/>
-                  </a:lnTo>
-                  <a:lnTo>
-                    <a:pt x="3800173" y="2539643"/>
-                  </a:lnTo>
-                  <a:lnTo>
-                    <a:pt x="3871795" y="2533185"/>
-                  </a:lnTo>
-                  <a:lnTo>
-                    <a:pt x="3943418" y="2526684"/>
-                  </a:lnTo>
-                  <a:lnTo>
-                    <a:pt x="4015040" y="2520138"/>
-                  </a:lnTo>
-                  <a:lnTo>
-                    <a:pt x="4086663" y="2513547"/>
-                  </a:lnTo>
-                  <a:lnTo>
-                    <a:pt x="4158285" y="2506911"/>
-                  </a:lnTo>
-                  <a:lnTo>
-                    <a:pt x="4229908" y="2500230"/>
-                  </a:lnTo>
-                  <a:lnTo>
-                    <a:pt x="4301530" y="2493503"/>
-                  </a:lnTo>
-                  <a:lnTo>
-                    <a:pt x="4373153" y="2486731"/>
-                  </a:lnTo>
-                  <a:lnTo>
-                    <a:pt x="4444775" y="2479911"/>
-                  </a:lnTo>
-                  <a:lnTo>
-                    <a:pt x="4516398" y="2473046"/>
-                  </a:lnTo>
-                  <a:lnTo>
-                    <a:pt x="4588020" y="2466133"/>
-                  </a:lnTo>
-                  <a:lnTo>
-                    <a:pt x="4659643" y="2459173"/>
-                  </a:lnTo>
-                  <a:lnTo>
-                    <a:pt x="4731265" y="2452165"/>
-                  </a:lnTo>
-                  <a:lnTo>
-                    <a:pt x="4802888" y="2445109"/>
-                  </a:lnTo>
-                  <a:lnTo>
-                    <a:pt x="4874510" y="2438006"/>
-                  </a:lnTo>
-                  <a:lnTo>
-                    <a:pt x="4946133" y="2430853"/>
+                    <a:pt x="6750" y="14037"/>
+                  </a:lnTo>
+                  <a:lnTo>
+                    <a:pt x="78372" y="156851"/>
+                  </a:lnTo>
+                  <a:lnTo>
+                    <a:pt x="149995" y="293787"/>
+                  </a:lnTo>
+                  <a:lnTo>
+                    <a:pt x="221617" y="425086"/>
+                  </a:lnTo>
+                  <a:lnTo>
+                    <a:pt x="293240" y="550981"/>
+                  </a:lnTo>
+                  <a:lnTo>
+                    <a:pt x="364862" y="671694"/>
+                  </a:lnTo>
+                  <a:lnTo>
+                    <a:pt x="436485" y="787439"/>
+                  </a:lnTo>
+                  <a:lnTo>
+                    <a:pt x="508107" y="898420"/>
+                  </a:lnTo>
+                  <a:lnTo>
+                    <a:pt x="579730" y="1004832"/>
+                  </a:lnTo>
+                  <a:lnTo>
+                    <a:pt x="651352" y="1106865"/>
+                  </a:lnTo>
+                  <a:lnTo>
+                    <a:pt x="722975" y="1204698"/>
+                  </a:lnTo>
+                  <a:lnTo>
+                    <a:pt x="794597" y="1298504"/>
+                  </a:lnTo>
+                  <a:lnTo>
+                    <a:pt x="866220" y="1388449"/>
+                  </a:lnTo>
+                  <a:lnTo>
+                    <a:pt x="937843" y="1474692"/>
+                  </a:lnTo>
+                  <a:lnTo>
+                    <a:pt x="1009465" y="1557385"/>
+                  </a:lnTo>
+                  <a:lnTo>
+                    <a:pt x="1081088" y="1636674"/>
+                  </a:lnTo>
+                  <a:lnTo>
+                    <a:pt x="1152710" y="1712700"/>
+                  </a:lnTo>
+                  <a:lnTo>
+                    <a:pt x="1224333" y="1785597"/>
+                  </a:lnTo>
+                  <a:lnTo>
+                    <a:pt x="1295955" y="1855493"/>
+                  </a:lnTo>
+                  <a:lnTo>
+                    <a:pt x="1367578" y="1922512"/>
+                  </a:lnTo>
+                  <a:lnTo>
+                    <a:pt x="1439200" y="1986773"/>
+                  </a:lnTo>
+                  <a:lnTo>
+                    <a:pt x="1510823" y="2048389"/>
+                  </a:lnTo>
+                  <a:lnTo>
+                    <a:pt x="1582445" y="2107468"/>
+                  </a:lnTo>
+                  <a:lnTo>
+                    <a:pt x="1654068" y="2164116"/>
+                  </a:lnTo>
+                  <a:lnTo>
+                    <a:pt x="1725690" y="2218432"/>
+                  </a:lnTo>
+                  <a:lnTo>
+                    <a:pt x="1797313" y="2270513"/>
+                  </a:lnTo>
+                  <a:lnTo>
+                    <a:pt x="1868935" y="2320450"/>
+                  </a:lnTo>
+                  <a:lnTo>
+                    <a:pt x="1940558" y="2368332"/>
+                  </a:lnTo>
+                  <a:lnTo>
+                    <a:pt x="2012180" y="2414242"/>
+                  </a:lnTo>
+                  <a:lnTo>
+                    <a:pt x="2083803" y="2458263"/>
+                  </a:lnTo>
+                  <a:lnTo>
+                    <a:pt x="2155425" y="2500472"/>
+                  </a:lnTo>
+                  <a:lnTo>
+                    <a:pt x="2227048" y="2540944"/>
+                  </a:lnTo>
+                  <a:lnTo>
+                    <a:pt x="2298671" y="2579750"/>
+                  </a:lnTo>
+                  <a:lnTo>
+                    <a:pt x="2370293" y="2616959"/>
+                  </a:lnTo>
+                  <a:lnTo>
+                    <a:pt x="2441916" y="2652636"/>
+                  </a:lnTo>
+                  <a:lnTo>
+                    <a:pt x="2513538" y="2648181"/>
+                  </a:lnTo>
+                  <a:lnTo>
+                    <a:pt x="2585161" y="2641728"/>
+                  </a:lnTo>
+                  <a:lnTo>
+                    <a:pt x="2656783" y="2635226"/>
+                  </a:lnTo>
+                  <a:lnTo>
+                    <a:pt x="2728406" y="2628673"/>
+                  </a:lnTo>
+                  <a:lnTo>
+                    <a:pt x="2800028" y="2622070"/>
+                  </a:lnTo>
+                  <a:lnTo>
+                    <a:pt x="2871651" y="2615415"/>
+                  </a:lnTo>
+                  <a:lnTo>
+                    <a:pt x="2943273" y="2608710"/>
+                  </a:lnTo>
+                  <a:lnTo>
+                    <a:pt x="3014896" y="2601952"/>
+                  </a:lnTo>
+                  <a:lnTo>
+                    <a:pt x="3086518" y="2595143"/>
+                  </a:lnTo>
+                  <a:lnTo>
+                    <a:pt x="3158141" y="2588280"/>
+                  </a:lnTo>
+                  <a:lnTo>
+                    <a:pt x="3229763" y="2581365"/>
+                  </a:lnTo>
+                  <a:lnTo>
+                    <a:pt x="3301386" y="2574397"/>
+                  </a:lnTo>
+                  <a:lnTo>
+                    <a:pt x="3373008" y="2567374"/>
+                  </a:lnTo>
+                  <a:lnTo>
+                    <a:pt x="3444631" y="2560297"/>
+                  </a:lnTo>
+                  <a:lnTo>
+                    <a:pt x="3516253" y="2553166"/>
+                  </a:lnTo>
+                  <a:lnTo>
+                    <a:pt x="3587876" y="2545980"/>
+                  </a:lnTo>
+                  <a:lnTo>
+                    <a:pt x="3659499" y="2538738"/>
+                  </a:lnTo>
+                  <a:lnTo>
+                    <a:pt x="3731121" y="2531440"/>
+                  </a:lnTo>
+                  <a:lnTo>
+                    <a:pt x="3802744" y="2524086"/>
+                  </a:lnTo>
+                  <a:lnTo>
+                    <a:pt x="3874366" y="2516675"/>
+                  </a:lnTo>
+                  <a:lnTo>
+                    <a:pt x="3945989" y="2509207"/>
+                  </a:lnTo>
+                  <a:lnTo>
+                    <a:pt x="4017611" y="2501681"/>
+                  </a:lnTo>
+                  <a:lnTo>
+                    <a:pt x="4089234" y="2494097"/>
+                  </a:lnTo>
+                  <a:lnTo>
+                    <a:pt x="4160856" y="2486454"/>
+                  </a:lnTo>
+                  <a:lnTo>
+                    <a:pt x="4232479" y="2478753"/>
+                  </a:lnTo>
+                  <a:lnTo>
+                    <a:pt x="4304101" y="2470992"/>
+                  </a:lnTo>
+                  <a:lnTo>
+                    <a:pt x="4375724" y="2463171"/>
+                  </a:lnTo>
+                  <a:lnTo>
+                    <a:pt x="4447346" y="2455289"/>
+                  </a:lnTo>
+                  <a:lnTo>
+                    <a:pt x="4518969" y="2447347"/>
+                  </a:lnTo>
+                  <a:lnTo>
+                    <a:pt x="4590591" y="2439344"/>
+                  </a:lnTo>
+                  <a:lnTo>
+                    <a:pt x="4662214" y="2431278"/>
+                  </a:lnTo>
+                  <a:lnTo>
+                    <a:pt x="4733836" y="2423151"/>
+                  </a:lnTo>
+                  <a:lnTo>
+                    <a:pt x="4805459" y="2414960"/>
+                  </a:lnTo>
+                  <a:lnTo>
+                    <a:pt x="4877081" y="2406706"/>
+                  </a:lnTo>
+                  <a:lnTo>
+                    <a:pt x="4948704" y="2398389"/>
                   </a:lnTo>
                 </a:path>
               </a:pathLst>
@@ -3698,312 +3698,312 @@
           </p:nvSpPr>
           <p:spPr>
             <a:xfrm>
-              <a:off x="1172049" y="4727830"/>
-              <a:ext cx="7090630" cy="639474"/>
+              <a:off x="1172049" y="4728087"/>
+              <a:ext cx="7090630" cy="638278"/>
             </a:xfrm>
             <a:custGeom>
               <a:avLst/>
               <a:pathLst>
-                <a:path w="7090630" h="639474">
+                <a:path w="7090630" h="638278">
                   <a:moveTo>
-                    <a:pt x="7090630" y="639474"/>
+                    <a:pt x="7090630" y="638278"/>
                   </a:moveTo>
                   <a:lnTo>
-                    <a:pt x="7019007" y="631302"/>
-                  </a:lnTo>
-                  <a:lnTo>
-                    <a:pt x="6947385" y="622778"/>
-                  </a:lnTo>
-                  <a:lnTo>
-                    <a:pt x="6875762" y="613887"/>
-                  </a:lnTo>
-                  <a:lnTo>
-                    <a:pt x="6804139" y="604614"/>
-                  </a:lnTo>
-                  <a:lnTo>
-                    <a:pt x="6732517" y="594942"/>
-                  </a:lnTo>
-                  <a:lnTo>
-                    <a:pt x="6660894" y="584854"/>
-                  </a:lnTo>
-                  <a:lnTo>
-                    <a:pt x="6589272" y="574331"/>
-                  </a:lnTo>
-                  <a:lnTo>
-                    <a:pt x="6517649" y="563356"/>
-                  </a:lnTo>
-                  <a:lnTo>
-                    <a:pt x="6446027" y="551909"/>
-                  </a:lnTo>
-                  <a:lnTo>
-                    <a:pt x="6374404" y="539969"/>
-                  </a:lnTo>
-                  <a:lnTo>
-                    <a:pt x="6302782" y="527515"/>
-                  </a:lnTo>
-                  <a:lnTo>
-                    <a:pt x="6231159" y="514526"/>
-                  </a:lnTo>
-                  <a:lnTo>
-                    <a:pt x="6159537" y="500978"/>
-                  </a:lnTo>
-                  <a:lnTo>
-                    <a:pt x="6087914" y="486847"/>
-                  </a:lnTo>
-                  <a:lnTo>
-                    <a:pt x="6016292" y="472108"/>
-                  </a:lnTo>
-                  <a:lnTo>
-                    <a:pt x="5944669" y="456734"/>
-                  </a:lnTo>
-                  <a:lnTo>
-                    <a:pt x="5873047" y="440700"/>
-                  </a:lnTo>
-                  <a:lnTo>
-                    <a:pt x="5801424" y="423975"/>
-                  </a:lnTo>
-                  <a:lnTo>
-                    <a:pt x="5729802" y="406531"/>
-                  </a:lnTo>
-                  <a:lnTo>
-                    <a:pt x="5658179" y="388336"/>
-                  </a:lnTo>
-                  <a:lnTo>
-                    <a:pt x="5586557" y="369359"/>
-                  </a:lnTo>
-                  <a:lnTo>
-                    <a:pt x="5514934" y="349565"/>
-                  </a:lnTo>
-                  <a:lnTo>
-                    <a:pt x="5443311" y="328919"/>
-                  </a:lnTo>
-                  <a:lnTo>
-                    <a:pt x="5371689" y="307385"/>
-                  </a:lnTo>
-                  <a:lnTo>
-                    <a:pt x="5300066" y="284925"/>
-                  </a:lnTo>
-                  <a:lnTo>
-                    <a:pt x="5228444" y="261498"/>
-                  </a:lnTo>
-                  <a:lnTo>
-                    <a:pt x="5156821" y="237063"/>
-                  </a:lnTo>
-                  <a:lnTo>
-                    <a:pt x="5085199" y="211577"/>
-                  </a:lnTo>
-                  <a:lnTo>
-                    <a:pt x="5013576" y="184995"/>
-                  </a:lnTo>
-                  <a:lnTo>
-                    <a:pt x="4941954" y="157269"/>
-                  </a:lnTo>
-                  <a:lnTo>
-                    <a:pt x="4870331" y="128349"/>
-                  </a:lnTo>
-                  <a:lnTo>
-                    <a:pt x="4798709" y="98186"/>
-                  </a:lnTo>
-                  <a:lnTo>
-                    <a:pt x="4727086" y="66725"/>
-                  </a:lnTo>
-                  <a:lnTo>
-                    <a:pt x="4655464" y="33910"/>
+                    <a:pt x="7019007" y="630083"/>
+                  </a:lnTo>
+                  <a:lnTo>
+                    <a:pt x="6947385" y="621538"/>
+                  </a:lnTo>
+                  <a:lnTo>
+                    <a:pt x="6875762" y="612625"/>
+                  </a:lnTo>
+                  <a:lnTo>
+                    <a:pt x="6804139" y="603330"/>
+                  </a:lnTo>
+                  <a:lnTo>
+                    <a:pt x="6732517" y="593635"/>
+                  </a:lnTo>
+                  <a:lnTo>
+                    <a:pt x="6660894" y="583525"/>
+                  </a:lnTo>
+                  <a:lnTo>
+                    <a:pt x="6589272" y="572980"/>
+                  </a:lnTo>
+                  <a:lnTo>
+                    <a:pt x="6517649" y="561983"/>
+                  </a:lnTo>
+                  <a:lnTo>
+                    <a:pt x="6446027" y="550514"/>
+                  </a:lnTo>
+                  <a:lnTo>
+                    <a:pt x="6374404" y="538552"/>
+                  </a:lnTo>
+                  <a:lnTo>
+                    <a:pt x="6302782" y="526077"/>
+                  </a:lnTo>
+                  <a:lnTo>
+                    <a:pt x="6231159" y="513067"/>
+                  </a:lnTo>
+                  <a:lnTo>
+                    <a:pt x="6159537" y="499498"/>
+                  </a:lnTo>
+                  <a:lnTo>
+                    <a:pt x="6087914" y="485346"/>
+                  </a:lnTo>
+                  <a:lnTo>
+                    <a:pt x="6016292" y="470587"/>
+                  </a:lnTo>
+                  <a:lnTo>
+                    <a:pt x="5944669" y="455195"/>
+                  </a:lnTo>
+                  <a:lnTo>
+                    <a:pt x="5873047" y="439141"/>
+                  </a:lnTo>
+                  <a:lnTo>
+                    <a:pt x="5801424" y="422399"/>
+                  </a:lnTo>
+                  <a:lnTo>
+                    <a:pt x="5729802" y="404938"/>
+                  </a:lnTo>
+                  <a:lnTo>
+                    <a:pt x="5658179" y="386727"/>
+                  </a:lnTo>
+                  <a:lnTo>
+                    <a:pt x="5586557" y="367734"/>
+                  </a:lnTo>
+                  <a:lnTo>
+                    <a:pt x="5514934" y="347927"/>
+                  </a:lnTo>
+                  <a:lnTo>
+                    <a:pt x="5443311" y="327269"/>
+                  </a:lnTo>
+                  <a:lnTo>
+                    <a:pt x="5371689" y="305724"/>
+                  </a:lnTo>
+                  <a:lnTo>
+                    <a:pt x="5300066" y="283254"/>
+                  </a:lnTo>
+                  <a:lnTo>
+                    <a:pt x="5228444" y="259820"/>
+                  </a:lnTo>
+                  <a:lnTo>
+                    <a:pt x="5156821" y="235380"/>
+                  </a:lnTo>
+                  <a:lnTo>
+                    <a:pt x="5085199" y="209890"/>
+                  </a:lnTo>
+                  <a:lnTo>
+                    <a:pt x="5013576" y="183307"/>
+                  </a:lnTo>
+                  <a:lnTo>
+                    <a:pt x="4941954" y="155582"/>
+                  </a:lnTo>
+                  <a:lnTo>
+                    <a:pt x="4870331" y="126667"/>
+                  </a:lnTo>
+                  <a:lnTo>
+                    <a:pt x="4798709" y="96511"/>
+                  </a:lnTo>
+                  <a:lnTo>
+                    <a:pt x="4727086" y="65061"/>
+                  </a:lnTo>
+                  <a:lnTo>
+                    <a:pt x="4655464" y="32260"/>
                   </a:lnTo>
                   <a:lnTo>
                     <a:pt x="4583841" y="0"/>
                   </a:lnTo>
                   <a:lnTo>
-                    <a:pt x="4512219" y="5634"/>
-                  </a:lnTo>
-                  <a:lnTo>
-                    <a:pt x="4440596" y="11230"/>
-                  </a:lnTo>
-                  <a:lnTo>
-                    <a:pt x="4368974" y="16788"/>
-                  </a:lnTo>
-                  <a:lnTo>
-                    <a:pt x="4297351" y="22308"/>
-                  </a:lnTo>
-                  <a:lnTo>
-                    <a:pt x="4225729" y="27791"/>
-                  </a:lnTo>
-                  <a:lnTo>
-                    <a:pt x="4154106" y="33237"/>
-                  </a:lnTo>
-                  <a:lnTo>
-                    <a:pt x="4082483" y="38645"/>
-                  </a:lnTo>
-                  <a:lnTo>
-                    <a:pt x="4010861" y="44017"/>
-                  </a:lnTo>
-                  <a:lnTo>
-                    <a:pt x="3939238" y="49352"/>
-                  </a:lnTo>
-                  <a:lnTo>
-                    <a:pt x="3867616" y="54652"/>
-                  </a:lnTo>
-                  <a:lnTo>
-                    <a:pt x="3795993" y="59915"/>
-                  </a:lnTo>
-                  <a:lnTo>
-                    <a:pt x="3724371" y="65142"/>
-                  </a:lnTo>
-                  <a:lnTo>
-                    <a:pt x="3652748" y="70334"/>
-                  </a:lnTo>
-                  <a:lnTo>
-                    <a:pt x="3581126" y="75490"/>
-                  </a:lnTo>
-                  <a:lnTo>
-                    <a:pt x="3509503" y="80612"/>
-                  </a:lnTo>
-                  <a:lnTo>
-                    <a:pt x="3437881" y="85699"/>
-                  </a:lnTo>
-                  <a:lnTo>
-                    <a:pt x="3366258" y="90751"/>
-                  </a:lnTo>
-                  <a:lnTo>
-                    <a:pt x="3294636" y="95769"/>
-                  </a:lnTo>
-                  <a:lnTo>
-                    <a:pt x="3223013" y="100753"/>
-                  </a:lnTo>
-                  <a:lnTo>
-                    <a:pt x="3151391" y="105703"/>
-                  </a:lnTo>
-                  <a:lnTo>
-                    <a:pt x="3079768" y="110619"/>
-                  </a:lnTo>
-                  <a:lnTo>
-                    <a:pt x="3008146" y="115502"/>
-                  </a:lnTo>
-                  <a:lnTo>
-                    <a:pt x="2936523" y="120351"/>
-                  </a:lnTo>
-                  <a:lnTo>
-                    <a:pt x="2864901" y="125168"/>
-                  </a:lnTo>
-                  <a:lnTo>
-                    <a:pt x="2793278" y="129952"/>
-                  </a:lnTo>
-                  <a:lnTo>
-                    <a:pt x="2721655" y="134704"/>
-                  </a:lnTo>
-                  <a:lnTo>
-                    <a:pt x="2650033" y="139423"/>
-                  </a:lnTo>
-                  <a:lnTo>
-                    <a:pt x="2578410" y="144110"/>
-                  </a:lnTo>
-                  <a:lnTo>
-                    <a:pt x="2506788" y="148766"/>
-                  </a:lnTo>
-                  <a:lnTo>
-                    <a:pt x="2435165" y="153390"/>
-                  </a:lnTo>
-                  <a:lnTo>
-                    <a:pt x="2363543" y="157982"/>
-                  </a:lnTo>
-                  <a:lnTo>
-                    <a:pt x="2291920" y="162543"/>
-                  </a:lnTo>
-                  <a:lnTo>
-                    <a:pt x="2220298" y="167073"/>
-                  </a:lnTo>
-                  <a:lnTo>
-                    <a:pt x="2148675" y="171573"/>
-                  </a:lnTo>
-                  <a:lnTo>
-                    <a:pt x="2077053" y="176042"/>
-                  </a:lnTo>
-                  <a:lnTo>
-                    <a:pt x="2005430" y="180480"/>
-                  </a:lnTo>
-                  <a:lnTo>
-                    <a:pt x="1933808" y="184888"/>
-                  </a:lnTo>
-                  <a:lnTo>
-                    <a:pt x="1862185" y="189267"/>
-                  </a:lnTo>
-                  <a:lnTo>
-                    <a:pt x="1790563" y="193615"/>
-                  </a:lnTo>
-                  <a:lnTo>
-                    <a:pt x="1718940" y="197935"/>
-                  </a:lnTo>
-                  <a:lnTo>
-                    <a:pt x="1647318" y="202224"/>
-                  </a:lnTo>
-                  <a:lnTo>
-                    <a:pt x="1575695" y="206485"/>
-                  </a:lnTo>
-                  <a:lnTo>
-                    <a:pt x="1504073" y="210717"/>
-                  </a:lnTo>
-                  <a:lnTo>
-                    <a:pt x="1432450" y="214920"/>
-                  </a:lnTo>
-                  <a:lnTo>
-                    <a:pt x="1360827" y="219094"/>
-                  </a:lnTo>
-                  <a:lnTo>
-                    <a:pt x="1289205" y="223240"/>
-                  </a:lnTo>
-                  <a:lnTo>
-                    <a:pt x="1217582" y="227358"/>
-                  </a:lnTo>
-                  <a:lnTo>
-                    <a:pt x="1145960" y="231448"/>
-                  </a:lnTo>
-                  <a:lnTo>
-                    <a:pt x="1074337" y="235510"/>
-                  </a:lnTo>
-                  <a:lnTo>
-                    <a:pt x="1002715" y="239544"/>
-                  </a:lnTo>
-                  <a:lnTo>
-                    <a:pt x="931092" y="243551"/>
-                  </a:lnTo>
-                  <a:lnTo>
-                    <a:pt x="859470" y="247531"/>
-                  </a:lnTo>
-                  <a:lnTo>
-                    <a:pt x="787847" y="251484"/>
-                  </a:lnTo>
-                  <a:lnTo>
-                    <a:pt x="716225" y="255410"/>
-                  </a:lnTo>
-                  <a:lnTo>
-                    <a:pt x="644602" y="259309"/>
-                  </a:lnTo>
-                  <a:lnTo>
-                    <a:pt x="572980" y="263182"/>
-                  </a:lnTo>
-                  <a:lnTo>
-                    <a:pt x="501357" y="267029"/>
-                  </a:lnTo>
-                  <a:lnTo>
-                    <a:pt x="429735" y="270849"/>
-                  </a:lnTo>
-                  <a:lnTo>
-                    <a:pt x="358112" y="274644"/>
-                  </a:lnTo>
-                  <a:lnTo>
-                    <a:pt x="286490" y="278412"/>
-                  </a:lnTo>
-                  <a:lnTo>
-                    <a:pt x="214867" y="282155"/>
-                  </a:lnTo>
-                  <a:lnTo>
-                    <a:pt x="143245" y="285873"/>
-                  </a:lnTo>
-                  <a:lnTo>
-                    <a:pt x="71622" y="289565"/>
-                  </a:lnTo>
-                  <a:lnTo>
-                    <a:pt x="0" y="293233"/>
+                    <a:pt x="4512219" y="6354"/>
+                  </a:lnTo>
+                  <a:lnTo>
+                    <a:pt x="4440596" y="12659"/>
+                  </a:lnTo>
+                  <a:lnTo>
+                    <a:pt x="4368974" y="18916"/>
+                  </a:lnTo>
+                  <a:lnTo>
+                    <a:pt x="4297351" y="25125"/>
+                  </a:lnTo>
+                  <a:lnTo>
+                    <a:pt x="4225729" y="31287"/>
+                  </a:lnTo>
+                  <a:lnTo>
+                    <a:pt x="4154106" y="37401"/>
+                  </a:lnTo>
+                  <a:lnTo>
+                    <a:pt x="4082483" y="43469"/>
+                  </a:lnTo>
+                  <a:lnTo>
+                    <a:pt x="4010861" y="49490"/>
+                  </a:lnTo>
+                  <a:lnTo>
+                    <a:pt x="3939238" y="55465"/>
+                  </a:lnTo>
+                  <a:lnTo>
+                    <a:pt x="3867616" y="61394"/>
+                  </a:lnTo>
+                  <a:lnTo>
+                    <a:pt x="3795993" y="67277"/>
+                  </a:lnTo>
+                  <a:lnTo>
+                    <a:pt x="3724371" y="73116"/>
+                  </a:lnTo>
+                  <a:lnTo>
+                    <a:pt x="3652748" y="78910"/>
+                  </a:lnTo>
+                  <a:lnTo>
+                    <a:pt x="3581126" y="84659"/>
+                  </a:lnTo>
+                  <a:lnTo>
+                    <a:pt x="3509503" y="90364"/>
+                  </a:lnTo>
+                  <a:lnTo>
+                    <a:pt x="3437881" y="96026"/>
+                  </a:lnTo>
+                  <a:lnTo>
+                    <a:pt x="3366258" y="101644"/>
+                  </a:lnTo>
+                  <a:lnTo>
+                    <a:pt x="3294636" y="107219"/>
+                  </a:lnTo>
+                  <a:lnTo>
+                    <a:pt x="3223013" y="112752"/>
+                  </a:lnTo>
+                  <a:lnTo>
+                    <a:pt x="3151391" y="118242"/>
+                  </a:lnTo>
+                  <a:lnTo>
+                    <a:pt x="3079768" y="123690"/>
+                  </a:lnTo>
+                  <a:lnTo>
+                    <a:pt x="3008146" y="129096"/>
+                  </a:lnTo>
+                  <a:lnTo>
+                    <a:pt x="2936523" y="134461"/>
+                  </a:lnTo>
+                  <a:lnTo>
+                    <a:pt x="2864901" y="139785"/>
+                  </a:lnTo>
+                  <a:lnTo>
+                    <a:pt x="2793278" y="145068"/>
+                  </a:lnTo>
+                  <a:lnTo>
+                    <a:pt x="2721655" y="150310"/>
+                  </a:lnTo>
+                  <a:lnTo>
+                    <a:pt x="2650033" y="155512"/>
+                  </a:lnTo>
+                  <a:lnTo>
+                    <a:pt x="2578410" y="160675"/>
+                  </a:lnTo>
+                  <a:lnTo>
+                    <a:pt x="2506788" y="165798"/>
+                  </a:lnTo>
+                  <a:lnTo>
+                    <a:pt x="2435165" y="170881"/>
+                  </a:lnTo>
+                  <a:lnTo>
+                    <a:pt x="2363543" y="175926"/>
+                  </a:lnTo>
+                  <a:lnTo>
+                    <a:pt x="2291920" y="180932"/>
+                  </a:lnTo>
+                  <a:lnTo>
+                    <a:pt x="2220298" y="185899"/>
+                  </a:lnTo>
+                  <a:lnTo>
+                    <a:pt x="2148675" y="190829"/>
+                  </a:lnTo>
+                  <a:lnTo>
+                    <a:pt x="2077053" y="195720"/>
+                  </a:lnTo>
+                  <a:lnTo>
+                    <a:pt x="2005430" y="200575"/>
+                  </a:lnTo>
+                  <a:lnTo>
+                    <a:pt x="1933808" y="205392"/>
+                  </a:lnTo>
+                  <a:lnTo>
+                    <a:pt x="1862185" y="210172"/>
+                  </a:lnTo>
+                  <a:lnTo>
+                    <a:pt x="1790563" y="214915"/>
+                  </a:lnTo>
+                  <a:lnTo>
+                    <a:pt x="1718940" y="219623"/>
+                  </a:lnTo>
+                  <a:lnTo>
+                    <a:pt x="1647318" y="224294"/>
+                  </a:lnTo>
+                  <a:lnTo>
+                    <a:pt x="1575695" y="228929"/>
+                  </a:lnTo>
+                  <a:lnTo>
+                    <a:pt x="1504073" y="233529"/>
+                  </a:lnTo>
+                  <a:lnTo>
+                    <a:pt x="1432450" y="238093"/>
+                  </a:lnTo>
+                  <a:lnTo>
+                    <a:pt x="1360827" y="242623"/>
+                  </a:lnTo>
+                  <a:lnTo>
+                    <a:pt x="1289205" y="247118"/>
+                  </a:lnTo>
+                  <a:lnTo>
+                    <a:pt x="1217582" y="251578"/>
+                  </a:lnTo>
+                  <a:lnTo>
+                    <a:pt x="1145960" y="256004"/>
+                  </a:lnTo>
+                  <a:lnTo>
+                    <a:pt x="1074337" y="260396"/>
+                  </a:lnTo>
+                  <a:lnTo>
+                    <a:pt x="1002715" y="264755"/>
+                  </a:lnTo>
+                  <a:lnTo>
+                    <a:pt x="931092" y="269080"/>
+                  </a:lnTo>
+                  <a:lnTo>
+                    <a:pt x="859470" y="273372"/>
+                  </a:lnTo>
+                  <a:lnTo>
+                    <a:pt x="787847" y="277632"/>
+                  </a:lnTo>
+                  <a:lnTo>
+                    <a:pt x="716225" y="281858"/>
+                  </a:lnTo>
+                  <a:lnTo>
+                    <a:pt x="644602" y="286052"/>
+                  </a:lnTo>
+                  <a:lnTo>
+                    <a:pt x="572980" y="290214"/>
+                  </a:lnTo>
+                  <a:lnTo>
+                    <a:pt x="501357" y="294344"/>
+                  </a:lnTo>
+                  <a:lnTo>
+                    <a:pt x="429735" y="298443"/>
+                  </a:lnTo>
+                  <a:lnTo>
+                    <a:pt x="358112" y="302510"/>
+                  </a:lnTo>
+                  <a:lnTo>
+                    <a:pt x="286490" y="306546"/>
+                  </a:lnTo>
+                  <a:lnTo>
+                    <a:pt x="214867" y="310551"/>
+                  </a:lnTo>
+                  <a:lnTo>
+                    <a:pt x="143245" y="314525"/>
+                  </a:lnTo>
+                  <a:lnTo>
+                    <a:pt x="71622" y="318469"/>
+                  </a:lnTo>
+                  <a:lnTo>
+                    <a:pt x="0" y="322382"/>
                   </a:lnTo>
                 </a:path>
               </a:pathLst>
@@ -4023,312 +4023,312 @@
           </p:nvSpPr>
           <p:spPr>
             <a:xfrm>
-              <a:off x="1172049" y="2989478"/>
-              <a:ext cx="7090630" cy="2120567"/>
+              <a:off x="1172049" y="3066298"/>
+              <a:ext cx="7090630" cy="2035783"/>
             </a:xfrm>
             <a:custGeom>
               <a:avLst/>
               <a:pathLst>
-                <a:path w="7090630" h="2120567">
+                <a:path w="7090630" h="2035783">
                   <a:moveTo>
                     <a:pt x="0" y="0"/>
                   </a:moveTo>
                   <a:lnTo>
-                    <a:pt x="71622" y="44934"/>
-                  </a:lnTo>
-                  <a:lnTo>
-                    <a:pt x="143245" y="89082"/>
-                  </a:lnTo>
-                  <a:lnTo>
-                    <a:pt x="214867" y="132458"/>
-                  </a:lnTo>
-                  <a:lnTo>
-                    <a:pt x="286490" y="175074"/>
-                  </a:lnTo>
-                  <a:lnTo>
-                    <a:pt x="358112" y="216945"/>
-                  </a:lnTo>
-                  <a:lnTo>
-                    <a:pt x="429735" y="258083"/>
-                  </a:lnTo>
-                  <a:lnTo>
-                    <a:pt x="501357" y="298501"/>
-                  </a:lnTo>
-                  <a:lnTo>
-                    <a:pt x="572980" y="338212"/>
-                  </a:lnTo>
-                  <a:lnTo>
-                    <a:pt x="644602" y="377228"/>
-                  </a:lnTo>
-                  <a:lnTo>
-                    <a:pt x="716225" y="415561"/>
-                  </a:lnTo>
-                  <a:lnTo>
-                    <a:pt x="787847" y="453224"/>
-                  </a:lnTo>
-                  <a:lnTo>
-                    <a:pt x="859470" y="490227"/>
-                  </a:lnTo>
-                  <a:lnTo>
-                    <a:pt x="931092" y="526583"/>
-                  </a:lnTo>
-                  <a:lnTo>
-                    <a:pt x="1002715" y="562302"/>
-                  </a:lnTo>
-                  <a:lnTo>
-                    <a:pt x="1074337" y="597397"/>
-                  </a:lnTo>
-                  <a:lnTo>
-                    <a:pt x="1145960" y="631877"/>
-                  </a:lnTo>
-                  <a:lnTo>
-                    <a:pt x="1217582" y="665754"/>
-                  </a:lnTo>
-                  <a:lnTo>
-                    <a:pt x="1289205" y="699038"/>
-                  </a:lnTo>
-                  <a:lnTo>
-                    <a:pt x="1360827" y="731740"/>
-                  </a:lnTo>
-                  <a:lnTo>
-                    <a:pt x="1432450" y="763870"/>
-                  </a:lnTo>
-                  <a:lnTo>
-                    <a:pt x="1504073" y="795437"/>
-                  </a:lnTo>
-                  <a:lnTo>
-                    <a:pt x="1575695" y="826452"/>
-                  </a:lnTo>
-                  <a:lnTo>
-                    <a:pt x="1647318" y="856924"/>
-                  </a:lnTo>
-                  <a:lnTo>
-                    <a:pt x="1718940" y="886862"/>
-                  </a:lnTo>
-                  <a:lnTo>
-                    <a:pt x="1790563" y="916277"/>
-                  </a:lnTo>
-                  <a:lnTo>
-                    <a:pt x="1862185" y="945177"/>
-                  </a:lnTo>
-                  <a:lnTo>
-                    <a:pt x="1933808" y="973572"/>
-                  </a:lnTo>
-                  <a:lnTo>
-                    <a:pt x="2005430" y="1001469"/>
-                  </a:lnTo>
-                  <a:lnTo>
-                    <a:pt x="2077053" y="1028879"/>
-                  </a:lnTo>
-                  <a:lnTo>
-                    <a:pt x="2148675" y="1055808"/>
-                  </a:lnTo>
-                  <a:lnTo>
-                    <a:pt x="2220298" y="1082267"/>
-                  </a:lnTo>
-                  <a:lnTo>
-                    <a:pt x="2291920" y="1108262"/>
-                  </a:lnTo>
-                  <a:lnTo>
-                    <a:pt x="2363543" y="1133803"/>
-                  </a:lnTo>
-                  <a:lnTo>
-                    <a:pt x="2435165" y="1158897"/>
-                  </a:lnTo>
-                  <a:lnTo>
-                    <a:pt x="2506788" y="1183551"/>
-                  </a:lnTo>
-                  <a:lnTo>
-                    <a:pt x="2578410" y="1207774"/>
-                  </a:lnTo>
-                  <a:lnTo>
-                    <a:pt x="2650033" y="1231573"/>
-                  </a:lnTo>
-                  <a:lnTo>
-                    <a:pt x="2721655" y="1254956"/>
-                  </a:lnTo>
-                  <a:lnTo>
-                    <a:pt x="2793278" y="1277929"/>
-                  </a:lnTo>
-                  <a:lnTo>
-                    <a:pt x="2864901" y="1300501"/>
-                  </a:lnTo>
-                  <a:lnTo>
-                    <a:pt x="2936523" y="1322677"/>
-                  </a:lnTo>
-                  <a:lnTo>
-                    <a:pt x="3008146" y="1344466"/>
-                  </a:lnTo>
-                  <a:lnTo>
-                    <a:pt x="3079768" y="1365873"/>
-                  </a:lnTo>
-                  <a:lnTo>
-                    <a:pt x="3151391" y="1386905"/>
-                  </a:lnTo>
-                  <a:lnTo>
-                    <a:pt x="3223013" y="1407570"/>
-                  </a:lnTo>
-                  <a:lnTo>
-                    <a:pt x="3294636" y="1427873"/>
-                  </a:lnTo>
-                  <a:lnTo>
-                    <a:pt x="3366258" y="1447820"/>
-                  </a:lnTo>
-                  <a:lnTo>
-                    <a:pt x="3437881" y="1467419"/>
-                  </a:lnTo>
-                  <a:lnTo>
-                    <a:pt x="3509503" y="1486674"/>
-                  </a:lnTo>
-                  <a:lnTo>
-                    <a:pt x="3581126" y="1505593"/>
-                  </a:lnTo>
-                  <a:lnTo>
-                    <a:pt x="3652748" y="1524180"/>
-                  </a:lnTo>
-                  <a:lnTo>
-                    <a:pt x="3724371" y="1542442"/>
-                  </a:lnTo>
-                  <a:lnTo>
-                    <a:pt x="3795993" y="1560385"/>
-                  </a:lnTo>
-                  <a:lnTo>
-                    <a:pt x="3867616" y="1578014"/>
-                  </a:lnTo>
-                  <a:lnTo>
-                    <a:pt x="3939238" y="1595334"/>
-                  </a:lnTo>
-                  <a:lnTo>
-                    <a:pt x="4010861" y="1612351"/>
-                  </a:lnTo>
-                  <a:lnTo>
-                    <a:pt x="4082483" y="1629070"/>
-                  </a:lnTo>
-                  <a:lnTo>
-                    <a:pt x="4154106" y="1645497"/>
-                  </a:lnTo>
-                  <a:lnTo>
-                    <a:pt x="4225729" y="1661636"/>
-                  </a:lnTo>
-                  <a:lnTo>
-                    <a:pt x="4297351" y="1677493"/>
-                  </a:lnTo>
-                  <a:lnTo>
-                    <a:pt x="4368974" y="1693072"/>
-                  </a:lnTo>
-                  <a:lnTo>
-                    <a:pt x="4440596" y="1708379"/>
-                  </a:lnTo>
-                  <a:lnTo>
-                    <a:pt x="4512219" y="1723418"/>
-                  </a:lnTo>
-                  <a:lnTo>
-                    <a:pt x="4583841" y="1738194"/>
-                  </a:lnTo>
-                  <a:lnTo>
-                    <a:pt x="4655464" y="1752711"/>
-                  </a:lnTo>
-                  <a:lnTo>
-                    <a:pt x="4727086" y="1766974"/>
-                  </a:lnTo>
-                  <a:lnTo>
-                    <a:pt x="4798709" y="1780987"/>
-                  </a:lnTo>
-                  <a:lnTo>
-                    <a:pt x="4870331" y="1794755"/>
-                  </a:lnTo>
-                  <a:lnTo>
-                    <a:pt x="4941954" y="1808283"/>
-                  </a:lnTo>
-                  <a:lnTo>
-                    <a:pt x="5013576" y="1821573"/>
-                  </a:lnTo>
-                  <a:lnTo>
-                    <a:pt x="5085199" y="1834631"/>
-                  </a:lnTo>
-                  <a:lnTo>
-                    <a:pt x="5156821" y="1847461"/>
-                  </a:lnTo>
-                  <a:lnTo>
-                    <a:pt x="5228444" y="1860066"/>
-                  </a:lnTo>
-                  <a:lnTo>
-                    <a:pt x="5300066" y="1872450"/>
-                  </a:lnTo>
-                  <a:lnTo>
-                    <a:pt x="5371689" y="1884618"/>
-                  </a:lnTo>
-                  <a:lnTo>
-                    <a:pt x="5443311" y="1896573"/>
-                  </a:lnTo>
-                  <a:lnTo>
-                    <a:pt x="5514934" y="1908318"/>
-                  </a:lnTo>
-                  <a:lnTo>
-                    <a:pt x="5586557" y="1919858"/>
-                  </a:lnTo>
-                  <a:lnTo>
-                    <a:pt x="5658179" y="1931196"/>
-                  </a:lnTo>
-                  <a:lnTo>
-                    <a:pt x="5729802" y="1942336"/>
-                  </a:lnTo>
-                  <a:lnTo>
-                    <a:pt x="5801424" y="1953281"/>
-                  </a:lnTo>
-                  <a:lnTo>
-                    <a:pt x="5873047" y="1964034"/>
-                  </a:lnTo>
-                  <a:lnTo>
-                    <a:pt x="5944669" y="1974599"/>
-                  </a:lnTo>
-                  <a:lnTo>
-                    <a:pt x="6016292" y="1984979"/>
-                  </a:lnTo>
-                  <a:lnTo>
-                    <a:pt x="6087914" y="1995178"/>
-                  </a:lnTo>
-                  <a:lnTo>
-                    <a:pt x="6159537" y="2005198"/>
-                  </a:lnTo>
-                  <a:lnTo>
-                    <a:pt x="6231159" y="2015043"/>
-                  </a:lnTo>
-                  <a:lnTo>
-                    <a:pt x="6302782" y="2024715"/>
-                  </a:lnTo>
-                  <a:lnTo>
-                    <a:pt x="6374404" y="2034218"/>
-                  </a:lnTo>
-                  <a:lnTo>
-                    <a:pt x="6446027" y="2043555"/>
-                  </a:lnTo>
-                  <a:lnTo>
-                    <a:pt x="6517649" y="2052728"/>
-                  </a:lnTo>
-                  <a:lnTo>
-                    <a:pt x="6589272" y="2061741"/>
-                  </a:lnTo>
-                  <a:lnTo>
-                    <a:pt x="6660894" y="2070597"/>
-                  </a:lnTo>
-                  <a:lnTo>
-                    <a:pt x="6732517" y="2079297"/>
-                  </a:lnTo>
-                  <a:lnTo>
-                    <a:pt x="6804139" y="2087845"/>
-                  </a:lnTo>
-                  <a:lnTo>
-                    <a:pt x="6875762" y="2096243"/>
-                  </a:lnTo>
-                  <a:lnTo>
-                    <a:pt x="6947385" y="2104495"/>
-                  </a:lnTo>
-                  <a:lnTo>
-                    <a:pt x="7019007" y="2112602"/>
-                  </a:lnTo>
-                  <a:lnTo>
-                    <a:pt x="7090630" y="2120567"/>
+                    <a:pt x="71622" y="42402"/>
+                  </a:lnTo>
+                  <a:lnTo>
+                    <a:pt x="143245" y="84083"/>
+                  </a:lnTo>
+                  <a:lnTo>
+                    <a:pt x="214867" y="125054"/>
+                  </a:lnTo>
+                  <a:lnTo>
+                    <a:pt x="286490" y="165328"/>
+                  </a:lnTo>
+                  <a:lnTo>
+                    <a:pt x="358112" y="204917"/>
+                  </a:lnTo>
+                  <a:lnTo>
+                    <a:pt x="429735" y="243831"/>
+                  </a:lnTo>
+                  <a:lnTo>
+                    <a:pt x="501357" y="282083"/>
+                  </a:lnTo>
+                  <a:lnTo>
+                    <a:pt x="572980" y="319684"/>
+                  </a:lnTo>
+                  <a:lnTo>
+                    <a:pt x="644602" y="356645"/>
+                  </a:lnTo>
+                  <a:lnTo>
+                    <a:pt x="716225" y="392976"/>
+                  </a:lnTo>
+                  <a:lnTo>
+                    <a:pt x="787847" y="428689"/>
+                  </a:lnTo>
+                  <a:lnTo>
+                    <a:pt x="859470" y="463795"/>
+                  </a:lnTo>
+                  <a:lnTo>
+                    <a:pt x="931092" y="498302"/>
+                  </a:lnTo>
+                  <a:lnTo>
+                    <a:pt x="1002715" y="532223"/>
+                  </a:lnTo>
+                  <a:lnTo>
+                    <a:pt x="1074337" y="565565"/>
+                  </a:lnTo>
+                  <a:lnTo>
+                    <a:pt x="1145960" y="598341"/>
+                  </a:lnTo>
+                  <a:lnTo>
+                    <a:pt x="1217582" y="630558"/>
+                  </a:lnTo>
+                  <a:lnTo>
+                    <a:pt x="1289205" y="662227"/>
+                  </a:lnTo>
+                  <a:lnTo>
+                    <a:pt x="1360827" y="693357"/>
+                  </a:lnTo>
+                  <a:lnTo>
+                    <a:pt x="1432450" y="723956"/>
+                  </a:lnTo>
+                  <a:lnTo>
+                    <a:pt x="1504073" y="754035"/>
+                  </a:lnTo>
+                  <a:lnTo>
+                    <a:pt x="1575695" y="783602"/>
+                  </a:lnTo>
+                  <a:lnTo>
+                    <a:pt x="1647318" y="812666"/>
+                  </a:lnTo>
+                  <a:lnTo>
+                    <a:pt x="1718940" y="841235"/>
+                  </a:lnTo>
+                  <a:lnTo>
+                    <a:pt x="1790563" y="869318"/>
+                  </a:lnTo>
+                  <a:lnTo>
+                    <a:pt x="1862185" y="896922"/>
+                  </a:lnTo>
+                  <a:lnTo>
+                    <a:pt x="1933808" y="924057"/>
+                  </a:lnTo>
+                  <a:lnTo>
+                    <a:pt x="2005430" y="950729"/>
+                  </a:lnTo>
+                  <a:lnTo>
+                    <a:pt x="2077053" y="976948"/>
+                  </a:lnTo>
+                  <a:lnTo>
+                    <a:pt x="2148675" y="1002721"/>
+                  </a:lnTo>
+                  <a:lnTo>
+                    <a:pt x="2220298" y="1028054"/>
+                  </a:lnTo>
+                  <a:lnTo>
+                    <a:pt x="2291920" y="1052957"/>
+                  </a:lnTo>
+                  <a:lnTo>
+                    <a:pt x="2363543" y="1077435"/>
+                  </a:lnTo>
+                  <a:lnTo>
+                    <a:pt x="2435165" y="1101497"/>
+                  </a:lnTo>
+                  <a:lnTo>
+                    <a:pt x="2506788" y="1125149"/>
+                  </a:lnTo>
+                  <a:lnTo>
+                    <a:pt x="2578410" y="1148399"/>
+                  </a:lnTo>
+                  <a:lnTo>
+                    <a:pt x="2650033" y="1171253"/>
+                  </a:lnTo>
+                  <a:lnTo>
+                    <a:pt x="2721655" y="1193718"/>
+                  </a:lnTo>
+                  <a:lnTo>
+                    <a:pt x="2793278" y="1215800"/>
+                  </a:lnTo>
+                  <a:lnTo>
+                    <a:pt x="2864901" y="1237506"/>
+                  </a:lnTo>
+                  <a:lnTo>
+                    <a:pt x="2936523" y="1258843"/>
+                  </a:lnTo>
+                  <a:lnTo>
+                    <a:pt x="3008146" y="1279817"/>
+                  </a:lnTo>
+                  <a:lnTo>
+                    <a:pt x="3079768" y="1300434"/>
+                  </a:lnTo>
+                  <a:lnTo>
+                    <a:pt x="3151391" y="1320700"/>
+                  </a:lnTo>
+                  <a:lnTo>
+                    <a:pt x="3223013" y="1340621"/>
+                  </a:lnTo>
+                  <a:lnTo>
+                    <a:pt x="3294636" y="1360202"/>
+                  </a:lnTo>
+                  <a:lnTo>
+                    <a:pt x="3366258" y="1379451"/>
+                  </a:lnTo>
+                  <a:lnTo>
+                    <a:pt x="3437881" y="1398371"/>
+                  </a:lnTo>
+                  <a:lnTo>
+                    <a:pt x="3509503" y="1416970"/>
+                  </a:lnTo>
+                  <a:lnTo>
+                    <a:pt x="3581126" y="1435252"/>
+                  </a:lnTo>
+                  <a:lnTo>
+                    <a:pt x="3652748" y="1453223"/>
+                  </a:lnTo>
+                  <a:lnTo>
+                    <a:pt x="3724371" y="1470888"/>
+                  </a:lnTo>
+                  <a:lnTo>
+                    <a:pt x="3795993" y="1488252"/>
+                  </a:lnTo>
+                  <a:lnTo>
+                    <a:pt x="3867616" y="1505321"/>
+                  </a:lnTo>
+                  <a:lnTo>
+                    <a:pt x="3939238" y="1522099"/>
+                  </a:lnTo>
+                  <a:lnTo>
+                    <a:pt x="4010861" y="1538591"/>
+                  </a:lnTo>
+                  <a:lnTo>
+                    <a:pt x="4082483" y="1554803"/>
+                  </a:lnTo>
+                  <a:lnTo>
+                    <a:pt x="4154106" y="1570739"/>
+                  </a:lnTo>
+                  <a:lnTo>
+                    <a:pt x="4225729" y="1586403"/>
+                  </a:lnTo>
+                  <a:lnTo>
+                    <a:pt x="4297351" y="1601801"/>
+                  </a:lnTo>
+                  <a:lnTo>
+                    <a:pt x="4368974" y="1616937"/>
+                  </a:lnTo>
+                  <a:lnTo>
+                    <a:pt x="4440596" y="1631815"/>
+                  </a:lnTo>
+                  <a:lnTo>
+                    <a:pt x="4512219" y="1646440"/>
+                  </a:lnTo>
+                  <a:lnTo>
+                    <a:pt x="4583841" y="1660815"/>
+                  </a:lnTo>
+                  <a:lnTo>
+                    <a:pt x="4655464" y="1674947"/>
+                  </a:lnTo>
+                  <a:lnTo>
+                    <a:pt x="4727086" y="1688837"/>
+                  </a:lnTo>
+                  <a:lnTo>
+                    <a:pt x="4798709" y="1702491"/>
+                  </a:lnTo>
+                  <a:lnTo>
+                    <a:pt x="4870331" y="1715913"/>
+                  </a:lnTo>
+                  <a:lnTo>
+                    <a:pt x="4941954" y="1729106"/>
+                  </a:lnTo>
+                  <a:lnTo>
+                    <a:pt x="5013576" y="1742075"/>
+                  </a:lnTo>
+                  <a:lnTo>
+                    <a:pt x="5085199" y="1754823"/>
+                  </a:lnTo>
+                  <a:lnTo>
+                    <a:pt x="5156821" y="1767354"/>
+                  </a:lnTo>
+                  <a:lnTo>
+                    <a:pt x="5228444" y="1779671"/>
+                  </a:lnTo>
+                  <a:lnTo>
+                    <a:pt x="5300066" y="1791779"/>
+                  </a:lnTo>
+                  <a:lnTo>
+                    <a:pt x="5371689" y="1803681"/>
+                  </a:lnTo>
+                  <a:lnTo>
+                    <a:pt x="5443311" y="1815380"/>
+                  </a:lnTo>
+                  <a:lnTo>
+                    <a:pt x="5514934" y="1826880"/>
+                  </a:lnTo>
+                  <a:lnTo>
+                    <a:pt x="5586557" y="1838184"/>
+                  </a:lnTo>
+                  <a:lnTo>
+                    <a:pt x="5658179" y="1849296"/>
+                  </a:lnTo>
+                  <a:lnTo>
+                    <a:pt x="5729802" y="1860219"/>
+                  </a:lnTo>
+                  <a:lnTo>
+                    <a:pt x="5801424" y="1870956"/>
+                  </a:lnTo>
+                  <a:lnTo>
+                    <a:pt x="5873047" y="1881510"/>
+                  </a:lnTo>
+                  <a:lnTo>
+                    <a:pt x="5944669" y="1891884"/>
+                  </a:lnTo>
+                  <a:lnTo>
+                    <a:pt x="6016292" y="1902082"/>
+                  </a:lnTo>
+                  <a:lnTo>
+                    <a:pt x="6087914" y="1912106"/>
+                  </a:lnTo>
+                  <a:lnTo>
+                    <a:pt x="6159537" y="1921959"/>
+                  </a:lnTo>
+                  <a:lnTo>
+                    <a:pt x="6231159" y="1931645"/>
+                  </a:lnTo>
+                  <a:lnTo>
+                    <a:pt x="6302782" y="1941166"/>
+                  </a:lnTo>
+                  <a:lnTo>
+                    <a:pt x="6374404" y="1950525"/>
+                  </a:lnTo>
+                  <a:lnTo>
+                    <a:pt x="6446027" y="1959724"/>
+                  </a:lnTo>
+                  <a:lnTo>
+                    <a:pt x="6517649" y="1968767"/>
+                  </a:lnTo>
+                  <a:lnTo>
+                    <a:pt x="6589272" y="1977656"/>
+                  </a:lnTo>
+                  <a:lnTo>
+                    <a:pt x="6660894" y="1986394"/>
+                  </a:lnTo>
+                  <a:lnTo>
+                    <a:pt x="6732517" y="1994983"/>
+                  </a:lnTo>
+                  <a:lnTo>
+                    <a:pt x="6804139" y="2003425"/>
+                  </a:lnTo>
+                  <a:lnTo>
+                    <a:pt x="6875762" y="2011724"/>
+                  </a:lnTo>
+                  <a:lnTo>
+                    <a:pt x="6947385" y="2019882"/>
+                  </a:lnTo>
+                  <a:lnTo>
+                    <a:pt x="7019007" y="2027901"/>
+                  </a:lnTo>
+                  <a:lnTo>
+                    <a:pt x="7090630" y="2035783"/>
                   </a:lnTo>
                 </a:path>
               </a:pathLst>
@@ -4400,7 +4400,7 @@
           </p:nvSpPr>
           <p:spPr>
             <a:xfrm>
-              <a:off x="5756448" y="2073503"/>
+              <a:off x="5759271" y="2073503"/>
               <a:ext cx="0" cy="3649639"/>
             </a:xfrm>
             <a:custGeom>
@@ -4443,7 +4443,7 @@
           </p:nvSpPr>
           <p:spPr>
             <a:xfrm>
-              <a:off x="4469314" y="2073503"/>
+              <a:off x="4504692" y="2073503"/>
               <a:ext cx="0" cy="3649639"/>
             </a:xfrm>
             <a:custGeom>
@@ -4486,7 +4486,7 @@
           </p:nvSpPr>
           <p:spPr>
             <a:xfrm>
-              <a:off x="6872676" y="2073503"/>
+              <a:off x="6871070" y="2073503"/>
               <a:ext cx="0" cy="3649639"/>
             </a:xfrm>
             <a:custGeom>
@@ -4759,7 +4759,7 @@
           </p:nvSpPr>
           <p:spPr>
             <a:xfrm>
-              <a:off x="3199861" y="5785772"/>
+              <a:off x="3201825" y="5785772"/>
               <a:ext cx="161574" cy="80101"/>
             </a:xfrm>
             <a:prstGeom prst="rect">
@@ -4805,7 +4805,7 @@
           </p:nvSpPr>
           <p:spPr>
             <a:xfrm>
-              <a:off x="5730225" y="5785772"/>
+              <a:off x="5727471" y="5785772"/>
               <a:ext cx="62179" cy="80101"/>
             </a:xfrm>
             <a:prstGeom prst="rect">
@@ -4851,7 +4851,7 @@
           </p:nvSpPr>
           <p:spPr>
             <a:xfrm>
-              <a:off x="8179802" y="5785772"/>
+              <a:off x="8172329" y="5785772"/>
               <a:ext cx="124358" cy="80101"/>
             </a:xfrm>
             <a:prstGeom prst="rect">
@@ -5022,7 +5022,7 @@
                   <a:latin typeface="Helvetica"/>
                   <a:cs typeface="Helvetica"/>
                 </a:rPr>
-                <a:t>subHR per 10 mL/min decline: 1.28 (0.91-1.79), p_Bonf = 0.944 (n = 6)  |  per IQR decline (Δ = 24.2): 1.81 (0.80-4.11)  |  IQR: [-13.0, 11.2]</a:t>
+                <a:t>subHR per 10 mL/min decline: 1.27 (0.90-1.79), p_Bonf = 1.000 (n = 6)  |  per IQR decline (Δ = 23.9): 1.76 (0.78-4.01)  |  IQR: [-12.7, 11.2]</a:t>
               </a:r>
             </a:p>
           </p:txBody>
